--- a/assets/pa45/P002_PA45_変数を操作しよう_20260416.pptx
+++ b/assets/pa45/P002_PA45_変数を操作しよう_20260416.pptx
@@ -20179,6 +20179,7 @@
           <a:bodyPr/>
           <a:lstStyle/>
           <a:p>
+            <a:pPr/>
             <a:endParaRPr lang="ja-JP" altLang="en-US"/>
           </a:p>
         </p:txBody>
@@ -20213,6 +20214,7 @@
           <a:bodyPr/>
           <a:lstStyle/>
           <a:p>
+            <a:pPr/>
             <a:endParaRPr lang="ja-JP" altLang="en-US"/>
           </a:p>
         </p:txBody>
@@ -20254,6 +20256,7 @@
           <a:bodyPr/>
           <a:lstStyle/>
           <a:p>
+            <a:pPr/>
             <a:endParaRPr lang="ja-JP" altLang="en-US"/>
           </a:p>
         </p:txBody>
@@ -20288,6 +20291,7 @@
           <a:bodyPr/>
           <a:lstStyle/>
           <a:p>
+            <a:pPr/>
             <a:endParaRPr lang="ja-JP" altLang="en-US"/>
           </a:p>
         </p:txBody>
@@ -20453,6 +20457,7 @@
           <a:bodyPr/>
           <a:lstStyle/>
           <a:p>
+            <a:pPr/>
             <a:endParaRPr lang="ja-JP" altLang="en-US"/>
           </a:p>
         </p:txBody>
@@ -20544,7 +20549,7 @@
               <a:buNone/>
             </a:pPr>
             <a:r>
-              <a:rPr lang="en-US" sz="1400" dirty="0">
+              <a:rPr lang="en-US" sz="1600" dirty="0">
                 <a:solidFill>
                   <a:srgbClr val="6B7280"/>
                 </a:solidFill>
@@ -20561,7 +20566,7 @@
               <a:buNone/>
             </a:pPr>
             <a:r>
-              <a:rPr lang="en-US" sz="1400" dirty="0">
+              <a:rPr lang="en-US" sz="1600" dirty="0">
                 <a:solidFill>
                   <a:srgbClr val="6B7280"/>
                 </a:solidFill>
@@ -20578,7 +20583,7 @@
               <a:buNone/>
             </a:pPr>
             <a:r>
-              <a:rPr lang="en-US" sz="1400" dirty="0">
+              <a:rPr lang="en-US" sz="1600" dirty="0">
                 <a:solidFill>
                   <a:srgbClr val="6B7280"/>
                 </a:solidFill>
@@ -20647,6 +20652,7 @@
           <a:bodyPr/>
           <a:lstStyle/>
           <a:p>
+            <a:pPr/>
             <a:endParaRPr lang="ja-JP" altLang="en-US"/>
           </a:p>
         </p:txBody>
@@ -20738,7 +20744,7 @@
               <a:buNone/>
             </a:pPr>
             <a:r>
-              <a:rPr lang="en-US" sz="1400" dirty="0">
+              <a:rPr lang="en-US" sz="1600" dirty="0">
                 <a:solidFill>
                   <a:srgbClr val="6B7280"/>
                 </a:solidFill>
@@ -20755,7 +20761,7 @@
               <a:buNone/>
             </a:pPr>
             <a:r>
-              <a:rPr lang="en-US" sz="1400" dirty="0">
+              <a:rPr lang="en-US" sz="1600" dirty="0">
                 <a:solidFill>
                   <a:srgbClr val="6B7280"/>
                 </a:solidFill>
@@ -20772,7 +20778,7 @@
               <a:buNone/>
             </a:pPr>
             <a:r>
-              <a:rPr lang="en-US" sz="1400" dirty="0">
+              <a:rPr lang="en-US" sz="1600" dirty="0">
                 <a:solidFill>
                   <a:srgbClr val="6B7280"/>
                 </a:solidFill>
@@ -20841,6 +20847,7 @@
           <a:bodyPr/>
           <a:lstStyle/>
           <a:p>
+            <a:pPr/>
             <a:endParaRPr lang="ja-JP" altLang="en-US"/>
           </a:p>
         </p:txBody>
@@ -20938,7 +20945,7 @@
               <a:buNone/>
             </a:pPr>
             <a:r>
-              <a:rPr lang="en-US" sz="1400" dirty="0">
+              <a:rPr lang="en-US" sz="1600" dirty="0">
                 <a:solidFill>
                   <a:srgbClr val="6B7280"/>
                 </a:solidFill>
@@ -20955,7 +20962,7 @@
               <a:buNone/>
             </a:pPr>
             <a:r>
-              <a:rPr lang="en-US" sz="1400">
+              <a:rPr lang="en-US" sz="1600">
                 <a:solidFill>
                   <a:srgbClr val="6B7280"/>
                 </a:solidFill>
@@ -20966,7 +20973,7 @@
               <a:t> 仕組みを理解します</a:t>
             </a:r>
             <a:r>
-              <a:rPr lang="en-US" sz="1400" dirty="0">
+              <a:rPr lang="en-US" sz="1600" dirty="0">
                 <a:solidFill>
                   <a:srgbClr val="6B7280"/>
                 </a:solidFill>
@@ -21035,6 +21042,7 @@
           <a:bodyPr/>
           <a:lstStyle/>
           <a:p>
+            <a:pPr/>
             <a:endParaRPr lang="ja-JP" altLang="en-US"/>
           </a:p>
         </p:txBody>
@@ -21064,7 +21072,7 @@
               <a:buNone/>
             </a:pPr>
             <a:r>
-              <a:rPr lang="en-US" sz="1300" b="1" dirty="0">
+              <a:rPr lang="en-US" sz="1600" b="1" dirty="0">
                 <a:solidFill>
                   <a:srgbClr val="374151"/>
                 </a:solidFill>
@@ -21124,6 +21132,7 @@
           <a:bodyPr/>
           <a:lstStyle/>
           <a:p>
+            <a:pPr/>
             <a:endParaRPr lang="ja-JP" altLang="en-US"/>
           </a:p>
         </p:txBody>
@@ -21158,6 +21167,7 @@
           <a:bodyPr/>
           <a:lstStyle/>
           <a:p>
+            <a:pPr/>
             <a:endParaRPr lang="ja-JP" altLang="en-US"/>
           </a:p>
         </p:txBody>
@@ -21187,7 +21197,7 @@
               <a:buNone/>
             </a:pPr>
             <a:r>
-              <a:rPr lang="en-US" sz="1500" b="1" kern="0" spc="150" dirty="0">
+              <a:rPr lang="en-US" sz="1600" b="1" kern="0" spc="150" dirty="0">
                 <a:solidFill>
                   <a:srgbClr val="6B7280"/>
                 </a:solidFill>
@@ -21281,6 +21291,7 @@
           <a:bodyPr/>
           <a:lstStyle/>
           <a:p>
+            <a:pPr/>
             <a:endParaRPr lang="ja-JP" altLang="en-US"/>
           </a:p>
         </p:txBody>
@@ -21310,7 +21321,7 @@
               <a:buNone/>
             </a:pPr>
             <a:r>
-              <a:rPr lang="en-US" sz="1500" dirty="0">
+              <a:rPr lang="en-US" sz="1600" dirty="0">
                 <a:solidFill>
                   <a:srgbClr val="9CA3AF"/>
                 </a:solidFill>
@@ -21347,6 +21358,7 @@
           <a:bodyPr/>
           <a:lstStyle/>
           <a:p>
+            <a:pPr/>
             <a:endParaRPr lang="ja-JP" altLang="en-US"/>
           </a:p>
         </p:txBody>
@@ -21381,6 +21393,7 @@
           <a:bodyPr/>
           <a:lstStyle/>
           <a:p>
+            <a:pPr/>
             <a:endParaRPr lang="ja-JP" altLang="en-US"/>
           </a:p>
         </p:txBody>
@@ -21410,7 +21423,7 @@
               <a:buNone/>
             </a:pPr>
             <a:r>
-              <a:rPr lang="en-US" sz="1200" dirty="0">
+              <a:rPr lang="en-US" sz="1600" dirty="0">
                 <a:solidFill>
                   <a:srgbClr val="9CA3AF"/>
                 </a:solidFill>
@@ -21449,7 +21462,7 @@
               <a:buNone/>
             </a:pPr>
             <a:r>
-              <a:rPr lang="en-US" sz="1200" dirty="0">
+              <a:rPr lang="en-US" sz="1600" dirty="0">
                 <a:solidFill>
                   <a:srgbClr val="9CA3AF"/>
                 </a:solidFill>
@@ -21744,6 +21757,7 @@
           <a:bodyPr/>
           <a:lstStyle/>
           <a:p>
+            <a:pPr/>
             <a:endParaRPr lang="ja-JP" altLang="en-US"/>
           </a:p>
         </p:txBody>
@@ -21785,6 +21799,7 @@
           <a:bodyPr/>
           <a:lstStyle/>
           <a:p>
+            <a:pPr/>
             <a:endParaRPr lang="ja-JP" altLang="en-US"/>
           </a:p>
         </p:txBody>
@@ -21819,6 +21834,7 @@
           <a:bodyPr/>
           <a:lstStyle/>
           <a:p>
+            <a:pPr/>
             <a:endParaRPr lang="ja-JP" altLang="en-US"/>
           </a:p>
         </p:txBody>
@@ -21855,6 +21871,7 @@
           <a:bodyPr/>
           <a:lstStyle/>
           <a:p>
+            <a:pPr/>
             <a:endParaRPr lang="ja-JP" altLang="en-US"/>
           </a:p>
         </p:txBody>
@@ -21914,6 +21931,7 @@
           <a:bodyPr/>
           <a:lstStyle/>
           <a:p>
+            <a:pPr/>
             <a:endParaRPr lang="ja-JP" altLang="en-US"/>
           </a:p>
         </p:txBody>
@@ -22904,6 +22922,7 @@
           <a:bodyPr/>
           <a:lstStyle/>
           <a:p>
+            <a:pPr/>
             <a:endParaRPr lang="ja-JP" altLang="en-US"/>
           </a:p>
         </p:txBody>
@@ -23055,6 +23074,7 @@
           <a:bodyPr/>
           <a:lstStyle/>
           <a:p>
+            <a:pPr/>
             <a:endParaRPr lang="ja-JP" altLang="en-US"/>
           </a:p>
         </p:txBody>
@@ -23089,6 +23109,7 @@
           <a:bodyPr/>
           <a:lstStyle/>
           <a:p>
+            <a:pPr/>
             <a:endParaRPr lang="ja-JP" altLang="en-US"/>
           </a:p>
         </p:txBody>
@@ -23118,7 +23139,7 @@
               <a:buNone/>
             </a:pPr>
             <a:r>
-              <a:rPr lang="en-US" sz="1500" b="1" kern="0" spc="150" dirty="0">
+              <a:rPr lang="en-US" sz="1600" b="1" kern="0" spc="150" dirty="0">
                 <a:solidFill>
                   <a:srgbClr val="6B7280"/>
                 </a:solidFill>
@@ -23201,6 +23222,7 @@
           <a:bodyPr/>
           <a:lstStyle/>
           <a:p>
+            <a:pPr/>
             <a:endParaRPr lang="ja-JP" altLang="en-US"/>
           </a:p>
         </p:txBody>
@@ -23267,6 +23289,7 @@
           <a:bodyPr/>
           <a:lstStyle/>
           <a:p>
+            <a:pPr/>
             <a:endParaRPr lang="ja-JP" altLang="en-US"/>
           </a:p>
         </p:txBody>
@@ -23301,6 +23324,7 @@
           <a:bodyPr/>
           <a:lstStyle/>
           <a:p>
+            <a:pPr/>
             <a:endParaRPr lang="ja-JP" altLang="en-US"/>
           </a:p>
         </p:txBody>
@@ -23330,7 +23354,7 @@
               <a:buNone/>
             </a:pPr>
             <a:r>
-              <a:rPr lang="en-US" sz="1200" dirty="0">
+              <a:rPr lang="en-US" sz="1600" dirty="0">
                 <a:solidFill>
                   <a:srgbClr val="9CA3AF"/>
                 </a:solidFill>
@@ -24022,6 +24046,7 @@
           <a:bodyPr/>
           <a:lstStyle/>
           <a:p>
+            <a:pPr/>
             <a:endParaRPr lang="ja-JP" altLang="en-US"/>
           </a:p>
         </p:txBody>
@@ -24063,6 +24088,7 @@
           <a:bodyPr/>
           <a:lstStyle/>
           <a:p>
+            <a:pPr/>
             <a:endParaRPr lang="ja-JP" altLang="en-US"/>
           </a:p>
         </p:txBody>
@@ -24097,6 +24123,7 @@
           <a:bodyPr/>
           <a:lstStyle/>
           <a:p>
+            <a:pPr/>
             <a:endParaRPr lang="ja-JP" altLang="en-US"/>
           </a:p>
         </p:txBody>
@@ -24131,6 +24158,7 @@
           <a:bodyPr/>
           <a:lstStyle/>
           <a:p>
+            <a:pPr/>
             <a:endParaRPr lang="ja-JP" altLang="en-US"/>
           </a:p>
         </p:txBody>
@@ -24190,6 +24218,7 @@
           <a:bodyPr/>
           <a:lstStyle/>
           <a:p>
+            <a:pPr/>
             <a:endParaRPr lang="ja-JP" altLang="en-US"/>
           </a:p>
         </p:txBody>
@@ -24249,6 +24278,7 @@
           <a:bodyPr/>
           <a:lstStyle/>
           <a:p>
+            <a:pPr/>
             <a:endParaRPr lang="ja-JP" altLang="en-US"/>
           </a:p>
         </p:txBody>
@@ -24308,6 +24338,7 @@
           <a:bodyPr/>
           <a:lstStyle/>
           <a:p>
+            <a:pPr/>
             <a:endParaRPr lang="ja-JP" altLang="en-US"/>
           </a:p>
         </p:txBody>
@@ -24367,6 +24398,7 @@
           <a:bodyPr/>
           <a:lstStyle/>
           <a:p>
+            <a:pPr/>
             <a:endParaRPr lang="ja-JP" altLang="en-US"/>
           </a:p>
         </p:txBody>
@@ -24406,7 +24438,7 @@
               <a:buNone/>
             </a:pPr>
             <a:r>
-              <a:rPr lang="en-US" sz="1500" b="1" dirty="0">
+              <a:rPr lang="en-US" sz="1600" b="1" dirty="0">
                 <a:solidFill>
                   <a:srgbClr val="0078D4"/>
                 </a:solidFill>
@@ -24523,7 +24555,7 @@
               <a:buNone/>
             </a:pPr>
             <a:r>
-              <a:rPr lang="en-US" sz="1000" b="1" dirty="0">
+              <a:rPr lang="en-US" sz="1600" b="1" dirty="0">
                 <a:solidFill>
                   <a:srgbClr val="2563EB"/>
                 </a:solidFill>
@@ -24631,7 +24663,7 @@
               <a:buNone/>
             </a:pPr>
             <a:r>
-              <a:rPr lang="en-US" sz="1000" dirty="0">
+              <a:rPr lang="en-US" sz="1600" dirty="0">
                 <a:solidFill>
                   <a:srgbClr val="374151"/>
                 </a:solidFill>
@@ -24675,6 +24707,7 @@
           <a:bodyPr/>
           <a:lstStyle/>
           <a:p>
+            <a:pPr/>
             <a:endParaRPr lang="ja-JP" altLang="en-US"/>
           </a:p>
         </p:txBody>
@@ -24714,7 +24747,7 @@
               <a:buNone/>
             </a:pPr>
             <a:r>
-              <a:rPr lang="en-US" sz="1500" b="1" dirty="0">
+              <a:rPr lang="en-US" sz="1600" b="1" dirty="0">
                 <a:solidFill>
                   <a:srgbClr val="0078D4"/>
                 </a:solidFill>
@@ -24898,6 +24931,7 @@
           <a:bodyPr/>
           <a:lstStyle/>
           <a:p>
+            <a:pPr/>
             <a:endParaRPr lang="ja-JP" altLang="en-US"/>
           </a:p>
         </p:txBody>
@@ -24927,7 +24961,7 @@
               <a:buNone/>
             </a:pPr>
             <a:r>
-              <a:rPr lang="en-US" sz="900" b="1" dirty="0">
+              <a:rPr lang="en-US" sz="1600" b="1" dirty="0">
                 <a:solidFill>
                   <a:srgbClr val="6B7280"/>
                 </a:solidFill>
@@ -24966,7 +25000,7 @@
               <a:buNone/>
             </a:pPr>
             <a:r>
-              <a:rPr lang="en-US" sz="900" b="1" dirty="0">
+              <a:rPr lang="en-US" sz="1600" b="1" dirty="0">
                 <a:solidFill>
                   <a:srgbClr val="6B7280"/>
                 </a:solidFill>
@@ -25005,7 +25039,7 @@
               <a:buNone/>
             </a:pPr>
             <a:r>
-              <a:rPr lang="en-US" sz="900" b="1" dirty="0">
+              <a:rPr lang="en-US" sz="1600" b="1" dirty="0">
                 <a:solidFill>
                   <a:srgbClr val="6B7280"/>
                 </a:solidFill>
@@ -25049,6 +25083,7 @@
           <a:bodyPr/>
           <a:lstStyle/>
           <a:p>
+            <a:pPr/>
             <a:endParaRPr lang="ja-JP" altLang="en-US"/>
           </a:p>
         </p:txBody>
@@ -25088,7 +25123,7 @@
               <a:buNone/>
             </a:pPr>
             <a:r>
-              <a:rPr lang="en-US" sz="1000" dirty="0">
+              <a:rPr lang="en-US" sz="1600" dirty="0">
                 <a:solidFill>
                   <a:srgbClr val="1F2937"/>
                 </a:solidFill>
@@ -25127,7 +25162,7 @@
               <a:buNone/>
             </a:pPr>
             <a:r>
-              <a:rPr lang="en-US" sz="1000" dirty="0">
+              <a:rPr lang="en-US" sz="1600" dirty="0">
                 <a:solidFill>
                   <a:srgbClr val="1F2937"/>
                 </a:solidFill>
@@ -25173,6 +25208,7 @@
           <a:bodyPr/>
           <a:lstStyle/>
           <a:p>
+            <a:pPr/>
             <a:endParaRPr lang="ja-JP" altLang="en-US"/>
           </a:p>
         </p:txBody>
@@ -25212,7 +25248,7 @@
               <a:buNone/>
             </a:pPr>
             <a:r>
-              <a:rPr lang="en-US" sz="900" b="1" dirty="0">
+              <a:rPr lang="en-US" sz="1600" b="1" dirty="0">
                 <a:solidFill>
                   <a:srgbClr val="6D28D9"/>
                 </a:solidFill>
@@ -25256,6 +25292,7 @@
           <a:bodyPr/>
           <a:lstStyle/>
           <a:p>
+            <a:pPr/>
             <a:endParaRPr lang="ja-JP" altLang="en-US"/>
           </a:p>
         </p:txBody>
@@ -25295,7 +25332,7 @@
               <a:buNone/>
             </a:pPr>
             <a:r>
-              <a:rPr lang="en-US" sz="1500" b="1" dirty="0">
+              <a:rPr lang="en-US" sz="1600" b="1" dirty="0">
                 <a:solidFill>
                   <a:srgbClr val="0078D4"/>
                 </a:solidFill>
@@ -25479,6 +25516,7 @@
           <a:bodyPr/>
           <a:lstStyle/>
           <a:p>
+            <a:pPr/>
             <a:endParaRPr lang="ja-JP" altLang="en-US"/>
           </a:p>
         </p:txBody>
@@ -25508,7 +25546,7 @@
               <a:buNone/>
             </a:pPr>
             <a:r>
-              <a:rPr lang="en-US" sz="1200" b="1" dirty="0">
+              <a:rPr lang="en-US" sz="1600" b="1" dirty="0">
                 <a:solidFill>
                   <a:srgbClr val="6B7280"/>
                 </a:solidFill>
@@ -25552,6 +25590,7 @@
           <a:bodyPr/>
           <a:lstStyle/>
           <a:p>
+            <a:pPr/>
             <a:endParaRPr lang="ja-JP" altLang="en-US"/>
           </a:p>
         </p:txBody>
@@ -25588,6 +25627,7 @@
           <a:bodyPr/>
           <a:lstStyle/>
           <a:p>
+            <a:pPr/>
             <a:endParaRPr lang="ja-JP" altLang="en-US"/>
           </a:p>
         </p:txBody>
@@ -25627,7 +25667,7 @@
               <a:buNone/>
             </a:pPr>
             <a:r>
-              <a:rPr lang="en-US" sz="900" b="1" dirty="0">
+              <a:rPr lang="en-US" sz="1600" b="1" dirty="0">
                 <a:solidFill>
                   <a:srgbClr val="1E40AF"/>
                 </a:solidFill>
@@ -25689,7 +25729,7 @@
               <a:buNone/>
             </a:pPr>
             <a:r>
-              <a:rPr lang="en-US" sz="1200" dirty="0">
+              <a:rPr lang="en-US" sz="1600" dirty="0">
                 <a:solidFill>
                   <a:srgbClr val="9CA3AF"/>
                 </a:solidFill>
@@ -25733,6 +25773,7 @@
           <a:bodyPr/>
           <a:lstStyle/>
           <a:p>
+            <a:pPr/>
             <a:endParaRPr lang="ja-JP" altLang="en-US"/>
           </a:p>
         </p:txBody>
@@ -25772,7 +25813,7 @@
               <a:buNone/>
             </a:pPr>
             <a:r>
-              <a:rPr lang="en-US" sz="1500" b="1" dirty="0">
+              <a:rPr lang="en-US" sz="1600" b="1" dirty="0">
                 <a:solidFill>
                   <a:srgbClr val="0078D4"/>
                 </a:solidFill>
@@ -26018,6 +26059,7 @@
           <a:bodyPr/>
           <a:lstStyle/>
           <a:p>
+            <a:pPr/>
             <a:endParaRPr lang="ja-JP" altLang="en-US" sz="4000"/>
           </a:p>
         </p:txBody>
@@ -26145,6 +26187,7 @@
           <a:bodyPr/>
           <a:lstStyle/>
           <a:p>
+            <a:pPr/>
             <a:endParaRPr lang="ja-JP" altLang="en-US"/>
           </a:p>
         </p:txBody>
@@ -26179,6 +26222,7 @@
           <a:bodyPr/>
           <a:lstStyle/>
           <a:p>
+            <a:pPr/>
             <a:endParaRPr lang="ja-JP" altLang="en-US"/>
           </a:p>
         </p:txBody>
@@ -26208,7 +26252,7 @@
               <a:buNone/>
             </a:pPr>
             <a:r>
-              <a:rPr lang="en-US" sz="1000" b="1" kern="0" spc="105" dirty="0">
+              <a:rPr lang="en-US" sz="1600" b="1" kern="0" spc="105" dirty="0">
                 <a:solidFill>
                   <a:srgbClr val="6B7280"/>
                 </a:solidFill>
@@ -26258,7 +26302,7 @@
               <a:t>10分ハンズオン</a:t>
             </a:r>
             <a:r>
-              <a:rPr lang="en-US" sz="1500" b="1" dirty="0">
+              <a:rPr lang="en-US" sz="1600" b="1" dirty="0">
                 <a:solidFill>
                   <a:srgbClr val="6B7280"/>
                 </a:solidFill>
@@ -26302,6 +26346,7 @@
           <a:bodyPr/>
           <a:lstStyle/>
           <a:p>
+            <a:pPr/>
             <a:endParaRPr lang="ja-JP" altLang="en-US"/>
           </a:p>
         </p:txBody>
@@ -26331,7 +26376,7 @@
               <a:buNone/>
             </a:pPr>
             <a:r>
-              <a:rPr lang="en-US" sz="1200" dirty="0">
+              <a:rPr lang="en-US" sz="1600" dirty="0">
                 <a:solidFill>
                   <a:srgbClr val="9CA3AF"/>
                 </a:solidFill>
@@ -26368,6 +26413,7 @@
           <a:bodyPr/>
           <a:lstStyle/>
           <a:p>
+            <a:pPr/>
             <a:endParaRPr lang="ja-JP" altLang="en-US"/>
           </a:p>
         </p:txBody>
@@ -26402,6 +26448,7 @@
           <a:bodyPr/>
           <a:lstStyle/>
           <a:p>
+            <a:pPr/>
             <a:endParaRPr lang="ja-JP" altLang="en-US"/>
           </a:p>
         </p:txBody>
@@ -26431,7 +26478,7 @@
               <a:buNone/>
             </a:pPr>
             <a:r>
-              <a:rPr lang="en-US" sz="1000" dirty="0">
+              <a:rPr lang="en-US" sz="1600" dirty="0">
                 <a:solidFill>
                   <a:srgbClr val="9CA3AF"/>
                 </a:solidFill>
@@ -26470,7 +26517,7 @@
               <a:buNone/>
             </a:pPr>
             <a:r>
-              <a:rPr lang="en-US" sz="1000" dirty="0">
+              <a:rPr lang="en-US" sz="1600" dirty="0">
                 <a:solidFill>
                   <a:srgbClr val="9CA3AF"/>
                 </a:solidFill>
@@ -26562,6 +26609,7 @@
           <a:bodyPr/>
           <a:lstStyle/>
           <a:p>
+            <a:pPr/>
             <a:endParaRPr lang="ja-JP" altLang="en-US"/>
           </a:p>
         </p:txBody>
@@ -26603,6 +26651,7 @@
           <a:bodyPr/>
           <a:lstStyle/>
           <a:p>
+            <a:pPr/>
             <a:endParaRPr lang="ja-JP" altLang="en-US"/>
           </a:p>
         </p:txBody>
@@ -26662,6 +26711,7 @@
           <a:bodyPr/>
           <a:lstStyle/>
           <a:p>
+            <a:pPr/>
             <a:endParaRPr lang="ja-JP" altLang="en-US"/>
           </a:p>
         </p:txBody>
@@ -26820,6 +26870,7 @@
           <a:bodyPr/>
           <a:lstStyle/>
           <a:p>
+            <a:pPr/>
             <a:endParaRPr lang="ja-JP" altLang="en-US" sz="3600"/>
           </a:p>
         </p:txBody>
@@ -27188,6 +27239,7 @@
           <a:bodyPr/>
           <a:lstStyle/>
           <a:p>
+            <a:pPr/>
             <a:endParaRPr lang="ja-JP" altLang="en-US"/>
           </a:p>
         </p:txBody>
@@ -27222,6 +27274,7 @@
           <a:bodyPr/>
           <a:lstStyle/>
           <a:p>
+            <a:pPr/>
             <a:endParaRPr lang="ja-JP" altLang="en-US"/>
           </a:p>
         </p:txBody>
@@ -27251,7 +27304,7 @@
               <a:buNone/>
             </a:pPr>
             <a:r>
-              <a:rPr lang="en-US" sz="1400" dirty="0">
+              <a:rPr lang="en-US" sz="1600" dirty="0">
                 <a:solidFill>
                   <a:srgbClr val="6B7280"/>
                 </a:solidFill>
@@ -27295,6 +27348,7 @@
           <a:bodyPr/>
           <a:lstStyle/>
           <a:p>
+            <a:pPr/>
             <a:endParaRPr lang="ja-JP" altLang="en-US"/>
           </a:p>
         </p:txBody>
@@ -27396,7 +27450,7 @@
               <a:buNone/>
             </a:pPr>
             <a:r>
-              <a:rPr lang="en-US" sz="1400" dirty="0">
+              <a:rPr lang="en-US" sz="1600" dirty="0">
                 <a:solidFill>
                   <a:srgbClr val="F87171"/>
                 </a:solidFill>
@@ -27435,7 +27489,7 @@
               <a:buNone/>
             </a:pPr>
             <a:r>
-              <a:rPr lang="en-US" sz="1400" dirty="0">
+              <a:rPr lang="en-US" sz="1600" dirty="0">
                 <a:solidFill>
                   <a:srgbClr val="6B7280"/>
                 </a:solidFill>
@@ -27479,6 +27533,7 @@
           <a:bodyPr/>
           <a:lstStyle/>
           <a:p>
+            <a:pPr/>
             <a:endParaRPr lang="ja-JP" altLang="en-US"/>
           </a:p>
         </p:txBody>
@@ -27610,6 +27665,7 @@
           <a:bodyPr/>
           <a:lstStyle/>
           <a:p>
+            <a:pPr/>
             <a:endParaRPr lang="ja-JP" altLang="en-US"/>
           </a:p>
         </p:txBody>
@@ -27768,6 +27824,7 @@
           <a:bodyPr/>
           <a:lstStyle/>
           <a:p>
+            <a:pPr/>
             <a:endParaRPr lang="ja-JP" altLang="en-US"/>
           </a:p>
         </p:txBody>
@@ -27802,6 +27859,7 @@
           <a:bodyPr/>
           <a:lstStyle/>
           <a:p>
+            <a:pPr/>
             <a:endParaRPr lang="ja-JP" altLang="en-US"/>
           </a:p>
         </p:txBody>
@@ -27831,7 +27889,7 @@
               <a:buNone/>
             </a:pPr>
             <a:r>
-              <a:rPr lang="en-US" sz="1200" dirty="0">
+              <a:rPr lang="en-US" sz="1600" dirty="0">
                 <a:solidFill>
                   <a:srgbClr val="6B7280"/>
                 </a:solidFill>
@@ -27875,6 +27933,7 @@
           <a:bodyPr/>
           <a:lstStyle/>
           <a:p>
+            <a:pPr/>
             <a:endParaRPr lang="ja-JP" altLang="en-US"/>
           </a:p>
         </p:txBody>
@@ -27976,7 +28035,7 @@
               <a:buNone/>
             </a:pPr>
             <a:r>
-              <a:rPr lang="en-US" sz="1200" dirty="0">
+              <a:rPr lang="en-US" sz="1600" dirty="0">
                 <a:solidFill>
                   <a:srgbClr val="6B7280"/>
                 </a:solidFill>
@@ -28098,6 +28157,7 @@
           <a:bodyPr/>
           <a:lstStyle/>
           <a:p>
+            <a:pPr/>
             <a:endParaRPr lang="ja-JP" altLang="en-US"/>
           </a:p>
         </p:txBody>
@@ -28127,7 +28187,7 @@
               <a:buNone/>
             </a:pPr>
             <a:r>
-              <a:rPr lang="en-US" sz="1500" b="1" kern="0" spc="150" dirty="0">
+              <a:rPr lang="en-US" sz="1600" b="1" kern="0" spc="150" dirty="0">
                 <a:solidFill>
                   <a:srgbClr val="6B7280"/>
                 </a:solidFill>
@@ -28221,6 +28281,7 @@
           <a:bodyPr/>
           <a:lstStyle/>
           <a:p>
+            <a:pPr/>
             <a:endParaRPr lang="ja-JP" altLang="en-US"/>
           </a:p>
         </p:txBody>
@@ -28294,6 +28355,7 @@
           <a:bodyPr/>
           <a:lstStyle/>
           <a:p>
+            <a:pPr/>
             <a:endParaRPr lang="ja-JP" altLang="en-US"/>
           </a:p>
         </p:txBody>
@@ -28323,7 +28385,7 @@
               <a:buNone/>
             </a:pPr>
             <a:r>
-              <a:rPr lang="en-US" sz="1400" dirty="0">
+              <a:rPr lang="en-US" sz="1600" dirty="0">
                 <a:solidFill>
                   <a:srgbClr val="9CA3AF"/>
                 </a:solidFill>
@@ -28362,7 +28424,7 @@
               <a:buNone/>
             </a:pPr>
             <a:r>
-              <a:rPr lang="en-US" sz="1200" dirty="0">
+              <a:rPr lang="en-US" sz="1600" dirty="0">
                 <a:solidFill>
                   <a:srgbClr val="9CA3AF"/>
                 </a:solidFill>
@@ -28657,6 +28719,7 @@
           <a:bodyPr/>
           <a:lstStyle/>
           <a:p>
+            <a:pPr/>
             <a:endParaRPr lang="ja-JP" altLang="en-US"/>
           </a:p>
         </p:txBody>
@@ -28698,6 +28761,7 @@
           <a:bodyPr/>
           <a:lstStyle/>
           <a:p>
+            <a:pPr/>
             <a:endParaRPr lang="ja-JP" altLang="en-US"/>
           </a:p>
         </p:txBody>
@@ -28732,6 +28796,7 @@
           <a:bodyPr/>
           <a:lstStyle/>
           <a:p>
+            <a:pPr/>
             <a:endParaRPr lang="ja-JP" altLang="en-US"/>
           </a:p>
         </p:txBody>
@@ -28798,6 +28863,7 @@
           <a:bodyPr/>
           <a:lstStyle/>
           <a:p>
+            <a:pPr/>
             <a:endParaRPr lang="ja-JP" altLang="en-US"/>
           </a:p>
         </p:txBody>
@@ -28832,6 +28898,7 @@
           <a:bodyPr/>
           <a:lstStyle/>
           <a:p>
+            <a:pPr/>
             <a:endParaRPr lang="ja-JP" altLang="en-US"/>
           </a:p>
         </p:txBody>
@@ -28991,6 +29058,7 @@
           <a:bodyPr/>
           <a:lstStyle/>
           <a:p>
+            <a:pPr/>
             <a:endParaRPr lang="ja-JP" altLang="en-US"/>
           </a:p>
         </p:txBody>
@@ -29025,6 +29093,7 @@
           <a:bodyPr/>
           <a:lstStyle/>
           <a:p>
+            <a:pPr/>
             <a:endParaRPr lang="ja-JP" altLang="en-US"/>
           </a:p>
         </p:txBody>
@@ -29217,6 +29286,7 @@
           <a:bodyPr/>
           <a:lstStyle/>
           <a:p>
+            <a:pPr/>
             <a:endParaRPr lang="ja-JP" altLang="en-US"/>
           </a:p>
         </p:txBody>
@@ -29251,6 +29321,7 @@
           <a:bodyPr/>
           <a:lstStyle/>
           <a:p>
+            <a:pPr/>
             <a:endParaRPr lang="ja-JP" altLang="en-US"/>
           </a:p>
         </p:txBody>
@@ -29410,6 +29481,7 @@
           <a:bodyPr/>
           <a:lstStyle/>
           <a:p>
+            <a:pPr/>
             <a:endParaRPr lang="ja-JP" altLang="en-US"/>
           </a:p>
         </p:txBody>
@@ -29640,6 +29712,7 @@
           <a:bodyPr/>
           <a:lstStyle/>
           <a:p>
+            <a:pPr/>
             <a:endParaRPr lang="ja-JP" altLang="en-US"/>
           </a:p>
         </p:txBody>
@@ -29674,6 +29747,7 @@
           <a:bodyPr/>
           <a:lstStyle/>
           <a:p>
+            <a:pPr/>
             <a:endParaRPr lang="ja-JP" altLang="en-US"/>
           </a:p>
         </p:txBody>
@@ -29703,7 +29777,7 @@
               <a:buNone/>
             </a:pPr>
             <a:r>
-              <a:rPr lang="en-US" sz="1200" b="1" kern="0" spc="120" dirty="0">
+              <a:rPr lang="en-US" sz="1600" b="1" kern="0" spc="120" dirty="0">
                 <a:solidFill>
                   <a:srgbClr val="6B7280"/>
                 </a:solidFill>
@@ -29797,6 +29871,7 @@
           <a:bodyPr/>
           <a:lstStyle/>
           <a:p>
+            <a:pPr/>
             <a:endParaRPr lang="ja-JP" altLang="en-US"/>
           </a:p>
         </p:txBody>
@@ -29826,7 +29901,7 @@
               <a:buNone/>
             </a:pPr>
             <a:r>
-              <a:rPr lang="en-US" sz="1300" dirty="0">
+              <a:rPr lang="en-US" sz="1600" dirty="0">
                 <a:solidFill>
                   <a:srgbClr val="9CA3AF"/>
                 </a:solidFill>
@@ -29863,6 +29938,7 @@
           <a:bodyPr/>
           <a:lstStyle/>
           <a:p>
+            <a:pPr/>
             <a:endParaRPr lang="ja-JP" altLang="en-US"/>
           </a:p>
         </p:txBody>
@@ -29897,6 +29973,7 @@
           <a:bodyPr/>
           <a:lstStyle/>
           <a:p>
+            <a:pPr/>
             <a:endParaRPr lang="ja-JP" altLang="en-US"/>
           </a:p>
         </p:txBody>
@@ -29926,7 +30003,7 @@
               <a:buNone/>
             </a:pPr>
             <a:r>
-              <a:rPr lang="en-US" sz="1000" dirty="0">
+              <a:rPr lang="en-US" sz="1600" dirty="0">
                 <a:solidFill>
                   <a:srgbClr val="9CA3AF"/>
                 </a:solidFill>
@@ -29965,7 +30042,7 @@
               <a:buNone/>
             </a:pPr>
             <a:r>
-              <a:rPr lang="en-US" sz="1000" dirty="0">
+              <a:rPr lang="en-US" sz="1600" dirty="0">
                 <a:solidFill>
                   <a:srgbClr val="9CA3AF"/>
                 </a:solidFill>
@@ -30260,6 +30337,7 @@
           <a:bodyPr/>
           <a:lstStyle/>
           <a:p>
+            <a:pPr/>
             <a:endParaRPr lang="ja-JP" altLang="en-US"/>
           </a:p>
         </p:txBody>
@@ -30301,6 +30379,7 @@
           <a:bodyPr/>
           <a:lstStyle/>
           <a:p>
+            <a:pPr/>
             <a:endParaRPr lang="ja-JP" altLang="en-US"/>
           </a:p>
         </p:txBody>
@@ -30335,6 +30414,7 @@
           <a:bodyPr/>
           <a:lstStyle/>
           <a:p>
+            <a:pPr/>
             <a:endParaRPr lang="ja-JP" altLang="en-US"/>
           </a:p>
         </p:txBody>
@@ -30376,6 +30456,7 @@
           <a:bodyPr/>
           <a:lstStyle/>
           <a:p>
+            <a:pPr/>
             <a:endParaRPr lang="ja-JP" altLang="en-US"/>
           </a:p>
         </p:txBody>
@@ -30412,6 +30493,7 @@
           <a:bodyPr/>
           <a:lstStyle/>
           <a:p>
+            <a:pPr/>
             <a:endParaRPr lang="ja-JP" altLang="en-US"/>
           </a:p>
         </p:txBody>
@@ -30471,6 +30553,7 @@
           <a:bodyPr/>
           <a:lstStyle/>
           <a:p>
+            <a:pPr/>
             <a:endParaRPr lang="ja-JP" altLang="en-US"/>
           </a:p>
         </p:txBody>
@@ -30677,6 +30760,7 @@
           <a:bodyPr/>
           <a:lstStyle/>
           <a:p>
+            <a:pPr/>
             <a:endParaRPr lang="ja-JP" altLang="en-US" sz="3200"/>
           </a:p>
         </p:txBody>
@@ -30819,6 +30903,7 @@
           <a:bodyPr/>
           <a:lstStyle/>
           <a:p>
+            <a:pPr/>
             <a:endParaRPr lang="ja-JP" altLang="en-US"/>
           </a:p>
         </p:txBody>
@@ -30855,6 +30940,7 @@
           <a:bodyPr/>
           <a:lstStyle/>
           <a:p>
+            <a:pPr/>
             <a:endParaRPr lang="ja-JP" altLang="en-US"/>
           </a:p>
         </p:txBody>
@@ -30914,6 +31000,7 @@
           <a:bodyPr/>
           <a:lstStyle/>
           <a:p>
+            <a:pPr/>
             <a:endParaRPr lang="ja-JP" altLang="en-US"/>
           </a:p>
         </p:txBody>
@@ -31153,6 +31240,7 @@
           <a:bodyPr/>
           <a:lstStyle/>
           <a:p>
+            <a:pPr/>
             <a:endParaRPr lang="ja-JP" altLang="en-US" sz="3200"/>
           </a:p>
         </p:txBody>
@@ -31295,6 +31383,7 @@
           <a:bodyPr/>
           <a:lstStyle/>
           <a:p>
+            <a:pPr/>
             <a:endParaRPr lang="ja-JP" altLang="en-US"/>
           </a:p>
         </p:txBody>
@@ -31331,6 +31420,7 @@
           <a:bodyPr/>
           <a:lstStyle/>
           <a:p>
+            <a:pPr/>
             <a:endParaRPr lang="ja-JP" altLang="en-US"/>
           </a:p>
         </p:txBody>
@@ -31390,6 +31480,7 @@
           <a:bodyPr/>
           <a:lstStyle/>
           <a:p>
+            <a:pPr/>
             <a:endParaRPr lang="ja-JP" altLang="en-US"/>
           </a:p>
         </p:txBody>
@@ -31618,6 +31709,7 @@
           <a:bodyPr/>
           <a:lstStyle/>
           <a:p>
+            <a:pPr/>
             <a:endParaRPr lang="ja-JP" altLang="en-US" sz="3200"/>
           </a:p>
         </p:txBody>
@@ -31746,6 +31838,7 @@
           <a:bodyPr/>
           <a:lstStyle/>
           <a:p>
+            <a:pPr/>
             <a:endParaRPr lang="ja-JP" altLang="en-US"/>
           </a:p>
         </p:txBody>
@@ -31780,6 +31873,7 @@
           <a:bodyPr/>
           <a:lstStyle/>
           <a:p>
+            <a:pPr/>
             <a:endParaRPr lang="ja-JP" altLang="en-US"/>
           </a:p>
         </p:txBody>
@@ -31809,7 +31903,7 @@
               <a:buNone/>
             </a:pPr>
             <a:r>
-              <a:rPr lang="en-US" sz="1200" b="1" kern="0" spc="120" dirty="0">
+              <a:rPr lang="en-US" sz="1600" b="1" kern="0" spc="120" dirty="0">
                 <a:solidFill>
                   <a:srgbClr val="6B7280"/>
                 </a:solidFill>
@@ -31914,6 +32008,7 @@
           <a:bodyPr/>
           <a:lstStyle/>
           <a:p>
+            <a:pPr/>
             <a:endParaRPr lang="ja-JP" altLang="en-US"/>
           </a:p>
         </p:txBody>
@@ -31943,7 +32038,7 @@
               <a:buNone/>
             </a:pPr>
             <a:r>
-              <a:rPr lang="en-US" sz="1200" dirty="0">
+              <a:rPr lang="en-US" sz="1600" dirty="0">
                 <a:solidFill>
                   <a:srgbClr val="9CA3AF"/>
                 </a:solidFill>
@@ -31980,6 +32075,7 @@
           <a:bodyPr/>
           <a:lstStyle/>
           <a:p>
+            <a:pPr/>
             <a:endParaRPr lang="ja-JP" altLang="en-US"/>
           </a:p>
         </p:txBody>
@@ -32014,6 +32110,7 @@
           <a:bodyPr/>
           <a:lstStyle/>
           <a:p>
+            <a:pPr/>
             <a:endParaRPr lang="ja-JP" altLang="en-US" sz="3200"/>
           </a:p>
         </p:txBody>
@@ -32043,7 +32140,7 @@
               <a:buNone/>
             </a:pPr>
             <a:r>
-              <a:rPr lang="en-US" sz="1000" dirty="0">
+              <a:rPr lang="en-US" sz="1600" dirty="0">
                 <a:solidFill>
                   <a:srgbClr val="9CA3AF"/>
                 </a:solidFill>
@@ -32082,7 +32179,7 @@
               <a:buNone/>
             </a:pPr>
             <a:r>
-              <a:rPr lang="en-US" sz="1000" dirty="0">
+              <a:rPr lang="en-US" sz="1600" dirty="0">
                 <a:solidFill>
                   <a:srgbClr val="9CA3AF"/>
                 </a:solidFill>
@@ -32377,6 +32474,7 @@
           <a:bodyPr/>
           <a:lstStyle/>
           <a:p>
+            <a:pPr/>
             <a:endParaRPr lang="ja-JP" altLang="en-US"/>
           </a:p>
         </p:txBody>
@@ -32418,6 +32516,7 @@
           <a:bodyPr/>
           <a:lstStyle/>
           <a:p>
+            <a:pPr/>
             <a:endParaRPr lang="ja-JP" altLang="en-US"/>
           </a:p>
         </p:txBody>
@@ -32452,6 +32551,7 @@
           <a:bodyPr/>
           <a:lstStyle/>
           <a:p>
+            <a:pPr/>
             <a:endParaRPr lang="ja-JP" altLang="en-US"/>
           </a:p>
         </p:txBody>
@@ -32559,6 +32659,7 @@
           <a:bodyPr/>
           <a:lstStyle/>
           <a:p>
+            <a:pPr/>
             <a:endParaRPr lang="ja-JP" altLang="en-US"/>
           </a:p>
         </p:txBody>
@@ -32781,6 +32882,7 @@
           <a:bodyPr/>
           <a:lstStyle/>
           <a:p>
+            <a:pPr/>
             <a:endParaRPr lang="ja-JP" altLang="en-US"/>
           </a:p>
         </p:txBody>
@@ -32857,6 +32959,7 @@
           <a:bodyPr/>
           <a:lstStyle/>
           <a:p>
+            <a:pPr/>
             <a:endParaRPr lang="ja-JP" altLang="en-US"/>
           </a:p>
         </p:txBody>
@@ -32891,6 +32994,7 @@
           <a:bodyPr/>
           <a:lstStyle/>
           <a:p>
+            <a:pPr/>
             <a:endParaRPr lang="ja-JP" altLang="en-US"/>
           </a:p>
         </p:txBody>
@@ -32920,7 +33024,7 @@
               <a:buNone/>
             </a:pPr>
             <a:r>
-              <a:rPr lang="en-US" sz="1500" b="1" kern="0" spc="150" dirty="0">
+              <a:rPr lang="en-US" sz="1600" b="1" kern="0" spc="150" dirty="0">
                 <a:solidFill>
                   <a:srgbClr val="6B7280"/>
                 </a:solidFill>
@@ -33014,6 +33118,7 @@
           <a:bodyPr/>
           <a:lstStyle/>
           <a:p>
+            <a:pPr/>
             <a:endParaRPr lang="ja-JP" altLang="en-US"/>
           </a:p>
         </p:txBody>
@@ -33043,7 +33148,7 @@
               <a:buNone/>
             </a:pPr>
             <a:r>
-              <a:rPr lang="en-US" sz="1300" dirty="0">
+              <a:rPr lang="en-US" sz="1600" dirty="0">
                 <a:solidFill>
                   <a:srgbClr val="9CA3AF"/>
                 </a:solidFill>
@@ -33080,6 +33185,7 @@
           <a:bodyPr/>
           <a:lstStyle/>
           <a:p>
+            <a:pPr/>
             <a:endParaRPr lang="ja-JP" altLang="en-US"/>
           </a:p>
         </p:txBody>
@@ -33114,6 +33220,7 @@
           <a:bodyPr/>
           <a:lstStyle/>
           <a:p>
+            <a:pPr/>
             <a:endParaRPr lang="ja-JP" altLang="en-US"/>
           </a:p>
         </p:txBody>
@@ -33143,7 +33250,7 @@
               <a:buNone/>
             </a:pPr>
             <a:r>
-              <a:rPr lang="en-US" sz="1300" dirty="0">
+              <a:rPr lang="en-US" sz="1600" dirty="0">
                 <a:solidFill>
                   <a:srgbClr val="9CA3AF"/>
                 </a:solidFill>
@@ -33182,7 +33289,7 @@
               <a:buNone/>
             </a:pPr>
             <a:r>
-              <a:rPr lang="en-US" sz="1300" dirty="0">
+              <a:rPr lang="en-US" sz="1600" dirty="0">
                 <a:solidFill>
                   <a:srgbClr val="9CA3AF"/>
                 </a:solidFill>
@@ -33274,6 +33381,7 @@
           <a:bodyPr/>
           <a:lstStyle/>
           <a:p>
+            <a:pPr/>
             <a:endParaRPr lang="ja-JP" altLang="en-US"/>
           </a:p>
         </p:txBody>
@@ -33404,7 +33512,7 @@
               <a:buNone/>
             </a:pPr>
             <a:r>
-              <a:rPr lang="en-US" sz="1500" dirty="0">
+              <a:rPr lang="en-US" sz="1600" dirty="0">
                 <a:solidFill>
                   <a:srgbClr val="6B7280"/>
                 </a:solidFill>
@@ -33528,7 +33636,7 @@
               <a:buNone/>
             </a:pPr>
             <a:r>
-              <a:rPr lang="en-US" sz="1200" dirty="0">
+              <a:rPr lang="en-US" sz="1600" dirty="0">
                 <a:solidFill>
                   <a:srgbClr val="4B5563"/>
                 </a:solidFill>
@@ -33652,7 +33760,7 @@
               <a:buNone/>
             </a:pPr>
             <a:r>
-              <a:rPr lang="en-US" sz="1200" dirty="0">
+              <a:rPr lang="en-US" sz="1600" dirty="0">
                 <a:solidFill>
                   <a:srgbClr val="4B5563"/>
                 </a:solidFill>
@@ -33757,6 +33865,7 @@
           <a:bodyPr/>
           <a:lstStyle/>
           <a:p>
+            <a:pPr/>
             <a:endParaRPr lang="ja-JP" altLang="en-US"/>
           </a:p>
         </p:txBody>
@@ -33894,6 +34003,7 @@
           <a:bodyPr/>
           <a:lstStyle/>
           <a:p>
+            <a:pPr/>
             <a:endParaRPr lang="ja-JP" altLang="en-US"/>
           </a:p>
         </p:txBody>
@@ -33930,6 +34040,7 @@
           <a:bodyPr/>
           <a:lstStyle/>
           <a:p>
+            <a:pPr/>
             <a:endParaRPr lang="ja-JP" altLang="en-US"/>
           </a:p>
         </p:txBody>
@@ -34026,6 +34137,7 @@
           <a:bodyPr/>
           <a:lstStyle/>
           <a:p>
+            <a:pPr/>
             <a:endParaRPr lang="ja-JP" altLang="en-US"/>
           </a:p>
         </p:txBody>
@@ -34055,7 +34167,7 @@
               <a:buNone/>
             </a:pPr>
             <a:r>
-              <a:rPr lang="en-US" sz="1000" b="1" dirty="0">
+              <a:rPr lang="en-US" sz="1600" b="1" dirty="0">
                 <a:solidFill>
                   <a:srgbClr val="1F2937"/>
                 </a:solidFill>
@@ -34094,7 +34206,7 @@
               <a:buNone/>
             </a:pPr>
             <a:r>
-              <a:rPr lang="en-US" sz="1000" dirty="0">
+              <a:rPr lang="en-US" sz="1600" dirty="0">
                 <a:solidFill>
                   <a:srgbClr val="9CA3AF"/>
                 </a:solidFill>
@@ -34133,7 +34245,7 @@
               <a:buNone/>
             </a:pPr>
             <a:r>
-              <a:rPr lang="en-US" sz="1000" b="1" dirty="0">
+              <a:rPr lang="en-US" sz="1600" b="1" dirty="0">
                 <a:solidFill>
                   <a:srgbClr val="2563EB"/>
                 </a:solidFill>
@@ -34172,7 +34284,7 @@
               <a:buNone/>
             </a:pPr>
             <a:r>
-              <a:rPr lang="en-US" sz="1000" kern="0" spc="26" dirty="0">
+              <a:rPr lang="en-US" sz="1600" kern="0" spc="26" dirty="0">
                 <a:solidFill>
                   <a:srgbClr val="6B7280"/>
                 </a:solidFill>
@@ -34211,7 +34323,7 @@
               <a:buNone/>
             </a:pPr>
             <a:r>
-              <a:rPr lang="en-US" sz="1000" dirty="0">
+              <a:rPr lang="en-US" sz="1600" dirty="0">
                 <a:solidFill>
                   <a:srgbClr val="9CA3AF"/>
                 </a:solidFill>
@@ -34261,6 +34373,7 @@
           <a:bodyPr/>
           <a:lstStyle/>
           <a:p>
+            <a:pPr/>
             <a:endParaRPr lang="ja-JP" altLang="en-US"/>
           </a:p>
         </p:txBody>
@@ -34726,6 +34839,7 @@
           <a:bodyPr/>
           <a:lstStyle/>
           <a:p>
+            <a:pPr/>
             <a:endParaRPr lang="ja-JP" altLang="en-US"/>
           </a:p>
         </p:txBody>
@@ -34767,6 +34881,7 @@
           <a:bodyPr/>
           <a:lstStyle/>
           <a:p>
+            <a:pPr/>
             <a:endParaRPr lang="ja-JP" altLang="en-US"/>
           </a:p>
         </p:txBody>
@@ -34801,6 +34916,7 @@
           <a:bodyPr/>
           <a:lstStyle/>
           <a:p>
+            <a:pPr/>
             <a:endParaRPr lang="ja-JP" altLang="en-US"/>
           </a:p>
         </p:txBody>
@@ -34955,7 +35071,7 @@
               <a:buNone/>
             </a:pPr>
             <a:r>
-              <a:rPr lang="en-US" sz="1400" dirty="0">
+              <a:rPr lang="en-US" sz="1600" dirty="0">
                 <a:solidFill>
                   <a:srgbClr val="4B5563"/>
                 </a:solidFill>
@@ -34966,7 +35082,7 @@
               <a:t>誹謗中傷・不適切な発言は</a:t>
             </a:r>
             <a:r>
-              <a:rPr lang="en-US" sz="1400" b="1" dirty="0">
+              <a:rPr lang="en-US" sz="1600" b="1" dirty="0">
                 <a:solidFill>
                   <a:srgbClr val="2563EB"/>
                 </a:solidFill>
@@ -35028,7 +35144,7 @@
               <a:buNone/>
             </a:pPr>
             <a:r>
-              <a:rPr lang="en-US" sz="1400" dirty="0">
+              <a:rPr lang="en-US" sz="1600" dirty="0">
                 <a:solidFill>
                   <a:srgbClr val="4B5563"/>
                 </a:solidFill>
@@ -35198,7 +35314,7 @@
               <a:buNone/>
             </a:pPr>
             <a:r>
-              <a:rPr lang="en-US" sz="1400" dirty="0">
+              <a:rPr lang="en-US" sz="1600" dirty="0">
                 <a:solidFill>
                   <a:srgbClr val="4B5563"/>
                 </a:solidFill>
@@ -35209,7 +35325,7 @@
               <a:t>後日</a:t>
             </a:r>
             <a:r>
-              <a:rPr lang="en-US" sz="1400">
+              <a:rPr lang="en-US" sz="1600">
                 <a:solidFill>
                   <a:srgbClr val="4B5563"/>
                 </a:solidFill>
@@ -35220,7 +35336,7 @@
               <a:t>YouTube公開</a:t>
             </a:r>
             <a:r>
-              <a:rPr lang="ja-JP" altLang="en-US" sz="1400">
+              <a:rPr lang="ja-JP" altLang="en-US" sz="1600">
                 <a:solidFill>
                   <a:srgbClr val="4B5563"/>
                 </a:solidFill>
@@ -35282,7 +35398,7 @@
               <a:buNone/>
             </a:pPr>
             <a:r>
-              <a:rPr lang="en-US" sz="1400" dirty="0">
+              <a:rPr lang="en-US" sz="1600" dirty="0">
                 <a:solidFill>
                   <a:srgbClr val="4B5563"/>
                 </a:solidFill>
@@ -35293,7 +35409,7 @@
               <a:t>参加者の情報は</a:t>
             </a:r>
             <a:r>
-              <a:rPr lang="en-US" sz="1400" b="1" dirty="0">
+              <a:rPr lang="en-US" sz="1600" b="1" dirty="0">
                 <a:solidFill>
                   <a:srgbClr val="0078D4"/>
                 </a:solidFill>
@@ -35355,7 +35471,7 @@
               <a:buNone/>
             </a:pPr>
             <a:r>
-              <a:rPr lang="en-US" sz="1400" dirty="0">
+              <a:rPr lang="en-US" sz="1600" dirty="0">
                 <a:solidFill>
                   <a:srgbClr val="4B5563"/>
                 </a:solidFill>
@@ -35542,7 +35658,7 @@
               <a:buNone/>
             </a:pPr>
             <a:r>
-              <a:rPr lang="en-US" sz="1400" dirty="0">
+              <a:rPr lang="en-US" sz="1600" dirty="0">
                 <a:solidFill>
                   <a:srgbClr val="4B5563"/>
                 </a:solidFill>
@@ -35604,7 +35720,7 @@
               <a:buNone/>
             </a:pPr>
             <a:r>
-              <a:rPr lang="en-US" sz="1400" dirty="0">
+              <a:rPr lang="en-US" sz="1600" dirty="0">
                 <a:solidFill>
                   <a:srgbClr val="4B5563"/>
                 </a:solidFill>
@@ -35615,7 +35731,7 @@
               <a:t>小さな質問でも</a:t>
             </a:r>
             <a:r>
-              <a:rPr lang="en-US" sz="1400" b="1" dirty="0">
+              <a:rPr lang="en-US" sz="1600" b="1" dirty="0">
                 <a:solidFill>
                   <a:srgbClr val="0078D4"/>
                 </a:solidFill>
@@ -35626,7 +35742,7 @@
               <a:t>OK</a:t>
             </a:r>
             <a:r>
-              <a:rPr lang="en-US" sz="1400" dirty="0">
+              <a:rPr lang="en-US" sz="1600" dirty="0">
                 <a:solidFill>
                   <a:srgbClr val="4B5563"/>
                 </a:solidFill>
@@ -35688,7 +35804,7 @@
               <a:buNone/>
             </a:pPr>
             <a:r>
-              <a:rPr lang="en-US" sz="1400" dirty="0">
+              <a:rPr lang="en-US" sz="1600" dirty="0">
                 <a:solidFill>
                   <a:srgbClr val="4B5563"/>
                 </a:solidFill>
@@ -35943,6 +36059,7 @@
           <a:bodyPr/>
           <a:lstStyle/>
           <a:p>
+            <a:pPr/>
             <a:endParaRPr lang="ja-JP" altLang="en-US"/>
           </a:p>
         </p:txBody>
@@ -36256,6 +36373,7 @@
           <a:bodyPr/>
           <a:lstStyle/>
           <a:p>
+            <a:pPr/>
             <a:endParaRPr lang="ja-JP" altLang="en-US"/>
           </a:p>
         </p:txBody>
@@ -36529,6 +36647,7 @@
           <a:bodyPr/>
           <a:lstStyle/>
           <a:p>
+            <a:pPr/>
             <a:endParaRPr lang="ja-JP" altLang="en-US"/>
           </a:p>
         </p:txBody>
@@ -36563,6 +36682,7 @@
           <a:bodyPr/>
           <a:lstStyle/>
           <a:p>
+            <a:pPr/>
             <a:endParaRPr lang="ja-JP" altLang="en-US"/>
           </a:p>
         </p:txBody>
@@ -36592,7 +36712,7 @@
               <a:buNone/>
             </a:pPr>
             <a:r>
-              <a:rPr lang="en-US" sz="1300" b="1" kern="0" spc="135" dirty="0">
+              <a:rPr lang="en-US" sz="1600" b="1" kern="0" spc="135" dirty="0">
                 <a:solidFill>
                   <a:srgbClr val="6B7280"/>
                 </a:solidFill>
@@ -36697,6 +36817,7 @@
           <a:bodyPr/>
           <a:lstStyle/>
           <a:p>
+            <a:pPr/>
             <a:endParaRPr lang="ja-JP" altLang="en-US"/>
           </a:p>
         </p:txBody>
@@ -36726,7 +36847,7 @@
               <a:buNone/>
             </a:pPr>
             <a:r>
-              <a:rPr lang="en-US" sz="1500" dirty="0">
+              <a:rPr lang="en-US" sz="1600" dirty="0">
                 <a:solidFill>
                   <a:srgbClr val="9CA3AF"/>
                 </a:solidFill>
@@ -36763,6 +36884,7 @@
           <a:bodyPr/>
           <a:lstStyle/>
           <a:p>
+            <a:pPr/>
             <a:endParaRPr lang="ja-JP" altLang="en-US"/>
           </a:p>
         </p:txBody>
@@ -36797,6 +36919,7 @@
           <a:bodyPr/>
           <a:lstStyle/>
           <a:p>
+            <a:pPr/>
             <a:endParaRPr lang="ja-JP" altLang="en-US"/>
           </a:p>
         </p:txBody>
@@ -36826,7 +36949,7 @@
               <a:buNone/>
             </a:pPr>
             <a:r>
-              <a:rPr lang="en-US" sz="1000" dirty="0">
+              <a:rPr lang="en-US" sz="1600" dirty="0">
                 <a:solidFill>
                   <a:srgbClr val="9CA3AF"/>
                 </a:solidFill>
@@ -36865,7 +36988,7 @@
               <a:buNone/>
             </a:pPr>
             <a:r>
-              <a:rPr lang="en-US" sz="1000" dirty="0">
+              <a:rPr lang="en-US" sz="1600" dirty="0">
                 <a:solidFill>
                   <a:srgbClr val="9CA3AF"/>
                 </a:solidFill>
@@ -37160,6 +37283,7 @@
           <a:bodyPr/>
           <a:lstStyle/>
           <a:p>
+            <a:pPr/>
             <a:endParaRPr lang="ja-JP" altLang="en-US"/>
           </a:p>
         </p:txBody>
@@ -37194,6 +37318,7 @@
           <a:bodyPr/>
           <a:lstStyle/>
           <a:p>
+            <a:pPr/>
             <a:endParaRPr lang="ja-JP" altLang="en-US"/>
           </a:p>
         </p:txBody>
@@ -37230,6 +37355,7 @@
           <a:bodyPr/>
           <a:lstStyle/>
           <a:p>
+            <a:pPr/>
             <a:endParaRPr lang="ja-JP" altLang="en-US"/>
           </a:p>
         </p:txBody>
@@ -37266,6 +37392,7 @@
           <a:bodyPr/>
           <a:lstStyle/>
           <a:p>
+            <a:pPr/>
             <a:endParaRPr lang="ja-JP" altLang="en-US"/>
           </a:p>
         </p:txBody>
@@ -37304,6 +37431,7 @@
           <a:bodyPr/>
           <a:lstStyle/>
           <a:p>
+            <a:pPr/>
             <a:endParaRPr lang="ja-JP" altLang="en-US"/>
           </a:p>
         </p:txBody>
@@ -37912,6 +38040,7 @@
           <a:bodyPr/>
           <a:lstStyle/>
           <a:p>
+            <a:pPr/>
             <a:endParaRPr lang="ja-JP" altLang="en-US"/>
           </a:p>
         </p:txBody>
@@ -38064,6 +38193,7 @@
           <a:bodyPr/>
           <a:lstStyle/>
           <a:p>
+            <a:pPr/>
             <a:endParaRPr lang="ja-JP" altLang="en-US"/>
           </a:p>
         </p:txBody>
@@ -38100,6 +38230,7 @@
           <a:bodyPr/>
           <a:lstStyle/>
           <a:p>
+            <a:pPr/>
             <a:endParaRPr lang="ja-JP" altLang="en-US"/>
           </a:p>
         </p:txBody>
@@ -38308,6 +38439,7 @@
           <a:bodyPr/>
           <a:lstStyle/>
           <a:p>
+            <a:pPr/>
             <a:endParaRPr lang="ja-JP" altLang="en-US"/>
           </a:p>
         </p:txBody>
@@ -38344,6 +38476,7 @@
           <a:bodyPr/>
           <a:lstStyle/>
           <a:p>
+            <a:pPr/>
             <a:endParaRPr lang="ja-JP" altLang="en-US"/>
           </a:p>
         </p:txBody>
@@ -38508,6 +38641,7 @@
           <a:bodyPr/>
           <a:lstStyle/>
           <a:p>
+            <a:pPr/>
             <a:endParaRPr lang="ja-JP" altLang="en-US"/>
           </a:p>
         </p:txBody>
@@ -38544,6 +38678,7 @@
           <a:bodyPr/>
           <a:lstStyle/>
           <a:p>
+            <a:pPr/>
             <a:endParaRPr lang="ja-JP" altLang="en-US"/>
           </a:p>
         </p:txBody>
@@ -38708,6 +38843,7 @@
           <a:bodyPr/>
           <a:lstStyle/>
           <a:p>
+            <a:pPr/>
             <a:endParaRPr lang="ja-JP" altLang="en-US"/>
           </a:p>
         </p:txBody>
@@ -38744,6 +38880,7 @@
           <a:bodyPr/>
           <a:lstStyle/>
           <a:p>
+            <a:pPr/>
             <a:endParaRPr lang="ja-JP" altLang="en-US"/>
           </a:p>
         </p:txBody>
@@ -39137,6 +39274,7 @@
           <a:bodyPr/>
           <a:lstStyle/>
           <a:p>
+            <a:pPr/>
             <a:endParaRPr lang="ja-JP" altLang="en-US"/>
           </a:p>
         </p:txBody>
@@ -39356,7 +39494,7 @@
               <a:buNone/>
             </a:pPr>
             <a:r>
-              <a:rPr lang="en-US" sz="1400" dirty="0">
+              <a:rPr lang="en-US" sz="1600" dirty="0">
                 <a:solidFill>
                   <a:srgbClr val="6B7280"/>
                 </a:solidFill>
@@ -39457,7 +39595,7 @@
               <a:buNone/>
             </a:pPr>
             <a:r>
-              <a:rPr lang="en-US" sz="1400" dirty="0">
+              <a:rPr lang="en-US" sz="1600" dirty="0">
                 <a:solidFill>
                   <a:srgbClr val="6B7280"/>
                 </a:solidFill>
@@ -39558,7 +39696,7 @@
               <a:buNone/>
             </a:pPr>
             <a:r>
-              <a:rPr lang="en-US" sz="1400" dirty="0">
+              <a:rPr lang="en-US" sz="1600" dirty="0">
                 <a:solidFill>
                   <a:srgbClr val="6B7280"/>
                 </a:solidFill>
@@ -39597,6 +39735,7 @@
           <a:bodyPr/>
           <a:lstStyle/>
           <a:p>
+            <a:pPr/>
             <a:endParaRPr lang="ja-JP" altLang="en-US"/>
           </a:p>
         </p:txBody>
@@ -39633,6 +39772,7 @@
           <a:bodyPr/>
           <a:lstStyle/>
           <a:p>
+            <a:pPr/>
             <a:endParaRPr lang="ja-JP" altLang="en-US"/>
           </a:p>
         </p:txBody>
@@ -39869,6 +40009,7 @@
           <a:bodyPr/>
           <a:lstStyle/>
           <a:p>
+            <a:pPr/>
             <a:endParaRPr lang="ja-JP" altLang="en-US"/>
           </a:p>
         </p:txBody>
@@ -39954,6 +40095,7 @@
           <a:bodyPr/>
           <a:lstStyle/>
           <a:p>
+            <a:pPr/>
             <a:endParaRPr lang="ja-JP" altLang="en-US"/>
           </a:p>
         </p:txBody>
@@ -40037,6 +40179,7 @@
           <a:bodyPr/>
           <a:lstStyle/>
           <a:p>
+            <a:pPr/>
             <a:endParaRPr lang="ja-JP" altLang="en-US"/>
           </a:p>
         </p:txBody>
@@ -40171,6 +40314,7 @@
           <a:bodyPr/>
           <a:lstStyle/>
           <a:p>
+            <a:pPr/>
             <a:endParaRPr lang="ja-JP" altLang="en-US"/>
           </a:p>
         </p:txBody>
@@ -40200,7 +40344,7 @@
               <a:buNone/>
             </a:pPr>
             <a:r>
-              <a:rPr lang="en-US" sz="1000" b="1" dirty="0">
+              <a:rPr lang="en-US" sz="1600" b="1" dirty="0">
                 <a:solidFill>
                   <a:srgbClr val="1F2937"/>
                 </a:solidFill>
@@ -40239,7 +40383,7 @@
               <a:buNone/>
             </a:pPr>
             <a:r>
-              <a:rPr lang="en-US" sz="1000" dirty="0">
+              <a:rPr lang="en-US" sz="1600" dirty="0">
                 <a:solidFill>
                   <a:srgbClr val="9CA3AF"/>
                 </a:solidFill>
@@ -40278,7 +40422,7 @@
               <a:buNone/>
             </a:pPr>
             <a:r>
-              <a:rPr lang="en-US" sz="1000" b="1" dirty="0">
+              <a:rPr lang="en-US" sz="1600" b="1" dirty="0">
                 <a:solidFill>
                   <a:srgbClr val="2563EB"/>
                 </a:solidFill>
@@ -40317,7 +40461,7 @@
               <a:buNone/>
             </a:pPr>
             <a:r>
-              <a:rPr lang="en-US" sz="1000" kern="0" spc="26" dirty="0">
+              <a:rPr lang="en-US" sz="1600" kern="0" spc="26" dirty="0">
                 <a:solidFill>
                   <a:srgbClr val="6B7280"/>
                 </a:solidFill>
@@ -40356,7 +40500,7 @@
               <a:buNone/>
             </a:pPr>
             <a:r>
-              <a:rPr lang="en-US" sz="1000" dirty="0">
+              <a:rPr lang="en-US" sz="1600" dirty="0">
                 <a:solidFill>
                   <a:srgbClr val="9CA3AF"/>
                 </a:solidFill>
@@ -40400,6 +40544,7 @@
           <a:bodyPr/>
           <a:lstStyle/>
           <a:p>
+            <a:pPr/>
             <a:endParaRPr lang="ja-JP" altLang="en-US"/>
           </a:p>
         </p:txBody>
@@ -40535,6 +40680,7 @@
           <a:bodyPr/>
           <a:lstStyle/>
           <a:p>
+            <a:pPr/>
             <a:endParaRPr lang="ja-JP" altLang="en-US"/>
           </a:p>
         </p:txBody>
@@ -40670,6 +40816,7 @@
           <a:bodyPr/>
           <a:lstStyle/>
           <a:p>
+            <a:pPr/>
             <a:endParaRPr lang="ja-JP" altLang="en-US"/>
           </a:p>
         </p:txBody>
@@ -40830,6 +40977,7 @@
           <a:bodyPr/>
           <a:lstStyle/>
           <a:p>
+            <a:pPr/>
             <a:endParaRPr lang="ja-JP" altLang="en-US"/>
           </a:p>
         </p:txBody>
@@ -40887,6 +41035,7 @@
           <a:bodyPr/>
           <a:lstStyle/>
           <a:p>
+            <a:pPr/>
             <a:endParaRPr lang="ja-JP" altLang="en-US"/>
           </a:p>
         </p:txBody>
@@ -40923,6 +41072,7 @@
           <a:bodyPr/>
           <a:lstStyle/>
           <a:p>
+            <a:pPr/>
             <a:endParaRPr lang="ja-JP" altLang="en-US"/>
           </a:p>
         </p:txBody>
@@ -40982,6 +41132,7 @@
           <a:bodyPr/>
           <a:lstStyle/>
           <a:p>
+            <a:pPr/>
             <a:endParaRPr lang="ja-JP" altLang="en-US"/>
           </a:p>
         </p:txBody>
@@ -41018,6 +41169,7 @@
           <a:bodyPr/>
           <a:lstStyle/>
           <a:p>
+            <a:pPr/>
             <a:endParaRPr lang="ja-JP" altLang="en-US"/>
           </a:p>
         </p:txBody>
@@ -41105,6 +41257,7 @@
           <a:bodyPr/>
           <a:lstStyle/>
           <a:p>
+            <a:pPr/>
             <a:endParaRPr lang="ja-JP" altLang="en-US"/>
           </a:p>
         </p:txBody>
@@ -41305,6 +41458,7 @@
           <a:bodyPr/>
           <a:lstStyle/>
           <a:p>
+            <a:pPr/>
             <a:endParaRPr lang="ja-JP" altLang="en-US"/>
           </a:p>
         </p:txBody>
@@ -41584,7 +41738,7 @@
               <a:buNone/>
             </a:pPr>
             <a:r>
-              <a:rPr lang="en-US" sz="1200" dirty="0">
+              <a:rPr lang="en-US" sz="1600" dirty="0">
                 <a:solidFill>
                   <a:srgbClr val="6B7280"/>
                 </a:solidFill>
@@ -42033,6 +42187,7 @@
           <a:bodyPr/>
           <a:lstStyle/>
           <a:p>
+            <a:pPr/>
             <a:endParaRPr lang="ja-JP" altLang="en-US"/>
           </a:p>
         </p:txBody>
@@ -42074,6 +42229,7 @@
           <a:bodyPr/>
           <a:lstStyle/>
           <a:p>
+            <a:pPr/>
             <a:endParaRPr lang="ja-JP" altLang="en-US"/>
           </a:p>
         </p:txBody>
@@ -42108,6 +42264,7 @@
           <a:bodyPr/>
           <a:lstStyle/>
           <a:p>
+            <a:pPr/>
             <a:endParaRPr lang="ja-JP" altLang="en-US"/>
           </a:p>
         </p:txBody>
@@ -42256,6 +42413,7 @@
           <a:bodyPr/>
           <a:lstStyle/>
           <a:p>
+            <a:pPr/>
             <a:endParaRPr lang="ja-JP" altLang="en-US"/>
           </a:p>
         </p:txBody>
@@ -42366,6 +42524,7 @@
           <a:bodyPr/>
           <a:lstStyle/>
           <a:p>
+            <a:pPr/>
             <a:endParaRPr lang="ja-JP" altLang="en-US"/>
           </a:p>
         </p:txBody>
@@ -42476,6 +42635,7 @@
           <a:bodyPr/>
           <a:lstStyle/>
           <a:p>
+            <a:pPr/>
             <a:endParaRPr lang="ja-JP" altLang="en-US"/>
           </a:p>
         </p:txBody>
@@ -42563,6 +42723,7 @@
           <a:bodyPr/>
           <a:lstStyle/>
           <a:p>
+            <a:pPr/>
             <a:endParaRPr lang="ja-JP" altLang="en-US"/>
           </a:p>
         </p:txBody>
@@ -42738,7 +42899,7 @@
               <a:buNone/>
             </a:pPr>
             <a:r>
-              <a:rPr lang="en-US" sz="1400" dirty="0">
+              <a:rPr lang="en-US" sz="1600" dirty="0">
                 <a:solidFill>
                   <a:srgbClr val="6B7280"/>
                 </a:solidFill>
@@ -42755,7 +42916,7 @@
               <a:buNone/>
             </a:pPr>
             <a:r>
-              <a:rPr lang="en-US" sz="1400" dirty="0">
+              <a:rPr lang="en-US" sz="1600" dirty="0">
                 <a:solidFill>
                   <a:srgbClr val="6B7280"/>
                 </a:solidFill>
@@ -42824,6 +42985,7 @@
           <a:bodyPr/>
           <a:lstStyle/>
           <a:p>
+            <a:pPr/>
             <a:endParaRPr lang="ja-JP" altLang="en-US"/>
           </a:p>
         </p:txBody>
@@ -42999,7 +43161,7 @@
               <a:buNone/>
             </a:pPr>
             <a:r>
-              <a:rPr lang="en-US" sz="1400" dirty="0">
+              <a:rPr lang="en-US" sz="1600" dirty="0">
                 <a:solidFill>
                   <a:srgbClr val="6B7280"/>
                 </a:solidFill>
@@ -43016,7 +43178,7 @@
               <a:buNone/>
             </a:pPr>
             <a:r>
-              <a:rPr lang="en-US" sz="1400" dirty="0">
+              <a:rPr lang="en-US" sz="1600" dirty="0">
                 <a:solidFill>
                   <a:srgbClr val="6B7280"/>
                 </a:solidFill>
@@ -43085,6 +43247,7 @@
           <a:bodyPr/>
           <a:lstStyle/>
           <a:p>
+            <a:pPr/>
             <a:endParaRPr lang="ja-JP" altLang="en-US"/>
           </a:p>
         </p:txBody>
@@ -43254,7 +43417,7 @@
               <a:buNone/>
             </a:pPr>
             <a:r>
-              <a:rPr lang="en-US" sz="1400" dirty="0">
+              <a:rPr lang="en-US" sz="1600" dirty="0">
                 <a:solidFill>
                   <a:srgbClr val="6B7280"/>
                 </a:solidFill>
@@ -43271,7 +43434,7 @@
               <a:buNone/>
             </a:pPr>
             <a:r>
-              <a:rPr lang="en-US" sz="1400" dirty="0">
+              <a:rPr lang="en-US" sz="1600" dirty="0">
                 <a:solidFill>
                   <a:srgbClr val="6B7280"/>
                 </a:solidFill>
@@ -43308,6 +43471,7 @@
           <a:bodyPr/>
           <a:lstStyle/>
           <a:p>
+            <a:pPr/>
             <a:endParaRPr lang="ja-JP" altLang="en-US"/>
           </a:p>
         </p:txBody>
@@ -43342,6 +43506,7 @@
           <a:bodyPr/>
           <a:lstStyle/>
           <a:p>
+            <a:pPr/>
             <a:endParaRPr lang="ja-JP" altLang="en-US"/>
           </a:p>
         </p:txBody>
@@ -43371,7 +43536,7 @@
               <a:buNone/>
             </a:pPr>
             <a:r>
-              <a:rPr lang="en-US" sz="1500" b="1" kern="0" spc="150" dirty="0">
+              <a:rPr lang="en-US" sz="1600" b="1" kern="0" spc="150" dirty="0">
                 <a:solidFill>
                   <a:srgbClr val="6B7280"/>
                 </a:solidFill>
@@ -43465,6 +43630,7 @@
           <a:bodyPr/>
           <a:lstStyle/>
           <a:p>
+            <a:pPr/>
             <a:endParaRPr lang="ja-JP" altLang="en-US"/>
           </a:p>
         </p:txBody>
@@ -43531,6 +43697,7 @@
           <a:bodyPr/>
           <a:lstStyle/>
           <a:p>
+            <a:pPr/>
             <a:endParaRPr lang="ja-JP" altLang="en-US"/>
           </a:p>
         </p:txBody>
@@ -43565,6 +43732,7 @@
           <a:bodyPr/>
           <a:lstStyle/>
           <a:p>
+            <a:pPr/>
             <a:endParaRPr lang="ja-JP" altLang="en-US"/>
           </a:p>
         </p:txBody>
@@ -43594,7 +43762,7 @@
               <a:buNone/>
             </a:pPr>
             <a:r>
-              <a:rPr lang="en-US" sz="1300" dirty="0">
+              <a:rPr lang="en-US" sz="1600" dirty="0">
                 <a:solidFill>
                   <a:srgbClr val="9CA3AF"/>
                 </a:solidFill>
@@ -43633,7 +43801,7 @@
               <a:buNone/>
             </a:pPr>
             <a:r>
-              <a:rPr lang="en-US" sz="1300" dirty="0">
+              <a:rPr lang="en-US" sz="1600" dirty="0">
                 <a:solidFill>
                   <a:srgbClr val="9CA3AF"/>
                 </a:solidFill>
@@ -43928,6 +44096,7 @@
           <a:bodyPr/>
           <a:lstStyle/>
           <a:p>
+            <a:pPr/>
             <a:endParaRPr lang="ja-JP" altLang="en-US"/>
           </a:p>
         </p:txBody>
@@ -43969,6 +44138,7 @@
           <a:bodyPr/>
           <a:lstStyle/>
           <a:p>
+            <a:pPr/>
             <a:endParaRPr lang="ja-JP" altLang="en-US"/>
           </a:p>
         </p:txBody>
@@ -43996,6 +44166,7 @@
           <a:bodyPr/>
           <a:lstStyle/>
           <a:p>
+            <a:pPr/>
             <a:endParaRPr lang="ja-JP" altLang="en-US"/>
           </a:p>
         </p:txBody>
@@ -44030,6 +44201,7 @@
           <a:bodyPr/>
           <a:lstStyle/>
           <a:p>
+            <a:pPr/>
             <a:endParaRPr lang="ja-JP" altLang="en-US"/>
           </a:p>
         </p:txBody>
@@ -44059,7 +44231,7 @@
               <a:buNone/>
             </a:pPr>
             <a:r>
-              <a:rPr lang="en-US" sz="1500" b="1" kern="0" spc="150" dirty="0">
+              <a:rPr lang="en-US" sz="1600" b="1" kern="0" spc="150" dirty="0">
                 <a:solidFill>
                   <a:srgbClr val="6B7280"/>
                 </a:solidFill>
@@ -44153,6 +44325,7 @@
           <a:bodyPr/>
           <a:lstStyle/>
           <a:p>
+            <a:pPr/>
             <a:endParaRPr lang="ja-JP" altLang="en-US"/>
           </a:p>
         </p:txBody>
@@ -44182,7 +44355,7 @@
               <a:buNone/>
             </a:pPr>
             <a:r>
-              <a:rPr lang="en-US" sz="1500" dirty="0">
+              <a:rPr lang="en-US" sz="1600" dirty="0">
                 <a:solidFill>
                   <a:srgbClr val="9CA3AF"/>
                 </a:solidFill>
@@ -44226,6 +44399,7 @@
           <a:bodyPr/>
           <a:lstStyle/>
           <a:p>
+            <a:pPr/>
             <a:endParaRPr lang="ja-JP" altLang="en-US"/>
           </a:p>
         </p:txBody>
@@ -44285,6 +44459,7 @@
           <a:bodyPr/>
           <a:lstStyle/>
           <a:p>
+            <a:pPr/>
             <a:endParaRPr lang="ja-JP" altLang="en-US"/>
           </a:p>
         </p:txBody>
@@ -44369,6 +44544,7 @@
           <a:bodyPr/>
           <a:lstStyle/>
           <a:p>
+            <a:pPr/>
             <a:endParaRPr lang="ja-JP" altLang="en-US"/>
           </a:p>
         </p:txBody>
@@ -44453,6 +44629,7 @@
           <a:bodyPr/>
           <a:lstStyle/>
           <a:p>
+            <a:pPr/>
             <a:endParaRPr lang="ja-JP" altLang="en-US"/>
           </a:p>
         </p:txBody>
@@ -44648,7 +44825,7 @@
               <a:buNone/>
             </a:pPr>
             <a:r>
-              <a:rPr lang="en-US" sz="1400" dirty="0">
+              <a:rPr lang="en-US" sz="1600" dirty="0">
                 <a:solidFill>
                   <a:srgbClr val="6B7280"/>
                 </a:solidFill>
@@ -44665,7 +44842,7 @@
               <a:buNone/>
             </a:pPr>
             <a:r>
-              <a:rPr lang="en-US" sz="1400" dirty="0">
+              <a:rPr lang="en-US" sz="1600" dirty="0">
                 <a:solidFill>
                   <a:srgbClr val="6B7280"/>
                 </a:solidFill>
@@ -44682,7 +44859,7 @@
               <a:buNone/>
             </a:pPr>
             <a:r>
-              <a:rPr lang="en-US" sz="1400" dirty="0">
+              <a:rPr lang="en-US" sz="1600" dirty="0">
                 <a:solidFill>
                   <a:srgbClr val="6B7280"/>
                 </a:solidFill>
@@ -44862,7 +45039,7 @@
               <a:buNone/>
             </a:pPr>
             <a:r>
-              <a:rPr lang="en-US" sz="1400" dirty="0">
+              <a:rPr lang="en-US" sz="1600" dirty="0">
                 <a:solidFill>
                   <a:srgbClr val="6B7280"/>
                 </a:solidFill>
@@ -44879,7 +45056,7 @@
               <a:buNone/>
             </a:pPr>
             <a:r>
-              <a:rPr lang="en-US" sz="1400" dirty="0">
+              <a:rPr lang="en-US" sz="1600" dirty="0">
                 <a:solidFill>
                   <a:srgbClr val="6B7280"/>
                 </a:solidFill>
@@ -44896,7 +45073,7 @@
               <a:buNone/>
             </a:pPr>
             <a:r>
-              <a:rPr lang="en-US" sz="1400" dirty="0">
+              <a:rPr lang="en-US" sz="1600" dirty="0">
                 <a:solidFill>
                   <a:srgbClr val="6B7280"/>
                 </a:solidFill>
@@ -45076,7 +45253,7 @@
               <a:buNone/>
             </a:pPr>
             <a:r>
-              <a:rPr lang="en-US" sz="1400" dirty="0">
+              <a:rPr lang="en-US" sz="1600" dirty="0">
                 <a:solidFill>
                   <a:srgbClr val="6B7280"/>
                 </a:solidFill>
@@ -45093,7 +45270,7 @@
               <a:buNone/>
             </a:pPr>
             <a:r>
-              <a:rPr lang="en-US" sz="1400" dirty="0">
+              <a:rPr lang="en-US" sz="1600" dirty="0">
                 <a:solidFill>
                   <a:srgbClr val="6B7280"/>
                 </a:solidFill>
@@ -45110,7 +45287,7 @@
               <a:buNone/>
             </a:pPr>
             <a:r>
-              <a:rPr lang="en-US" sz="1400" dirty="0">
+              <a:rPr lang="en-US" sz="1600" dirty="0">
                 <a:solidFill>
                   <a:srgbClr val="6B7280"/>
                 </a:solidFill>
@@ -45170,6 +45347,7 @@
           <a:bodyPr/>
           <a:lstStyle/>
           <a:p>
+            <a:pPr/>
             <a:endParaRPr lang="ja-JP" altLang="en-US"/>
           </a:p>
         </p:txBody>
@@ -45204,6 +45382,7 @@
           <a:bodyPr/>
           <a:lstStyle/>
           <a:p>
+            <a:pPr/>
             <a:endParaRPr lang="ja-JP" altLang="en-US"/>
           </a:p>
         </p:txBody>
@@ -45233,7 +45412,7 @@
               <a:buNone/>
             </a:pPr>
             <a:r>
-              <a:rPr lang="en-US" sz="1200" dirty="0">
+              <a:rPr lang="en-US" sz="1600" dirty="0">
                 <a:solidFill>
                   <a:srgbClr val="9CA3AF"/>
                 </a:solidFill>
@@ -45272,7 +45451,7 @@
               <a:buNone/>
             </a:pPr>
             <a:r>
-              <a:rPr lang="en-US" sz="1200" dirty="0">
+              <a:rPr lang="en-US" sz="1600" dirty="0">
                 <a:solidFill>
                   <a:srgbClr val="9CA3AF"/>
                 </a:solidFill>
@@ -45544,6 +45723,7 @@
           <a:bodyPr/>
           <a:lstStyle/>
           <a:p>
+            <a:pPr/>
             <a:endParaRPr lang="ja-JP" altLang="en-US"/>
           </a:p>
         </p:txBody>
@@ -45585,6 +45765,7 @@
           <a:bodyPr/>
           <a:lstStyle/>
           <a:p>
+            <a:pPr/>
             <a:endParaRPr lang="ja-JP" altLang="en-US"/>
           </a:p>
         </p:txBody>
@@ -45621,6 +45802,7 @@
           <a:bodyPr/>
           <a:lstStyle/>
           <a:p>
+            <a:pPr/>
             <a:endParaRPr lang="ja-JP" altLang="en-US"/>
           </a:p>
         </p:txBody>
@@ -45655,6 +45837,7 @@
           <a:bodyPr/>
           <a:lstStyle/>
           <a:p>
+            <a:pPr/>
             <a:endParaRPr lang="ja-JP" altLang="en-US"/>
           </a:p>
         </p:txBody>
@@ -45753,6 +45936,7 @@
           <a:bodyPr/>
           <a:lstStyle/>
           <a:p>
+            <a:pPr/>
             <a:endParaRPr lang="ja-JP" altLang="en-US"/>
           </a:p>
         </p:txBody>
@@ -45872,6 +46056,7 @@
           <a:bodyPr/>
           <a:lstStyle/>
           <a:p>
+            <a:pPr/>
             <a:endParaRPr lang="ja-JP" altLang="en-US" sz="3200"/>
           </a:p>
         </p:txBody>
@@ -45970,6 +46155,7 @@
           <a:bodyPr/>
           <a:lstStyle/>
           <a:p>
+            <a:pPr/>
             <a:endParaRPr lang="ja-JP" altLang="en-US" sz="3200"/>
           </a:p>
         </p:txBody>
@@ -46009,7 +46195,7 @@
               <a:buNone/>
             </a:pPr>
             <a:r>
-              <a:rPr lang="en-US" sz="1400" b="1" kern="0" spc="52" dirty="0">
+              <a:rPr lang="en-US" sz="1600" b="1" kern="0" spc="52" dirty="0">
                 <a:solidFill>
                   <a:srgbClr val="1D4ED8"/>
                 </a:solidFill>
@@ -46048,7 +46234,7 @@
               <a:buNone/>
             </a:pPr>
             <a:r>
-              <a:rPr lang="en-US" sz="1400" dirty="0">
+              <a:rPr lang="en-US" sz="1600" dirty="0">
                 <a:solidFill>
                   <a:srgbClr val="6B7280"/>
                 </a:solidFill>
@@ -46115,6 +46301,7 @@
           <a:bodyPr/>
           <a:lstStyle/>
           <a:p>
+            <a:pPr/>
             <a:endParaRPr lang="ja-JP" altLang="en-US" sz="3200"/>
           </a:p>
         </p:txBody>
@@ -46213,6 +46400,7 @@
           <a:bodyPr/>
           <a:lstStyle/>
           <a:p>
+            <a:pPr/>
             <a:endParaRPr lang="ja-JP" altLang="en-US" sz="3200"/>
           </a:p>
         </p:txBody>
@@ -46252,7 +46440,7 @@
               <a:buNone/>
             </a:pPr>
             <a:r>
-              <a:rPr lang="en-US" sz="1400" b="1" kern="0" spc="52" dirty="0">
+              <a:rPr lang="en-US" sz="1600" b="1" kern="0" spc="52" dirty="0">
                 <a:solidFill>
                   <a:srgbClr val="047857"/>
                 </a:solidFill>
@@ -46291,7 +46479,7 @@
               <a:buNone/>
             </a:pPr>
             <a:r>
-              <a:rPr lang="en-US" sz="1400" dirty="0">
+              <a:rPr lang="en-US" sz="1600" dirty="0">
                 <a:solidFill>
                   <a:srgbClr val="6B7280"/>
                 </a:solidFill>
@@ -46358,6 +46546,7 @@
           <a:bodyPr/>
           <a:lstStyle/>
           <a:p>
+            <a:pPr/>
             <a:endParaRPr lang="ja-JP" altLang="en-US" sz="3200"/>
           </a:p>
         </p:txBody>
@@ -46456,6 +46645,7 @@
           <a:bodyPr/>
           <a:lstStyle/>
           <a:p>
+            <a:pPr/>
             <a:endParaRPr lang="ja-JP" altLang="en-US" sz="3200"/>
           </a:p>
         </p:txBody>
@@ -46495,7 +46685,7 @@
               <a:buNone/>
             </a:pPr>
             <a:r>
-              <a:rPr lang="en-US" sz="1400" b="1" kern="0" spc="52" dirty="0">
+              <a:rPr lang="en-US" sz="1600" b="1" kern="0" spc="52" dirty="0">
                 <a:solidFill>
                   <a:srgbClr val="6D28D9"/>
                 </a:solidFill>
@@ -46534,7 +46724,7 @@
               <a:buNone/>
             </a:pPr>
             <a:r>
-              <a:rPr lang="en-US" sz="1400" dirty="0">
+              <a:rPr lang="en-US" sz="1600" dirty="0">
                 <a:solidFill>
                   <a:srgbClr val="6B7280"/>
                 </a:solidFill>
@@ -46573,6 +46763,7 @@
           <a:bodyPr/>
           <a:lstStyle/>
           <a:p>
+            <a:pPr/>
             <a:endParaRPr lang="ja-JP" altLang="en-US" sz="2400"/>
           </a:p>
         </p:txBody>
@@ -46609,6 +46800,7 @@
           <a:bodyPr/>
           <a:lstStyle/>
           <a:p>
+            <a:pPr/>
             <a:endParaRPr lang="ja-JP" altLang="en-US" sz="2400"/>
           </a:p>
         </p:txBody>
@@ -46677,7 +46869,7 @@
               <a:buNone/>
             </a:pPr>
             <a:r>
-              <a:rPr lang="en-US" sz="1100" dirty="0">
+              <a:rPr lang="en-US" sz="1600" dirty="0">
                 <a:solidFill>
                   <a:srgbClr val="4B5563"/>
                 </a:solidFill>
@@ -46716,6 +46908,7 @@
           <a:bodyPr/>
           <a:lstStyle/>
           <a:p>
+            <a:pPr/>
             <a:endParaRPr lang="ja-JP" altLang="en-US" sz="2400"/>
           </a:p>
         </p:txBody>
@@ -46752,6 +46945,7 @@
           <a:bodyPr/>
           <a:lstStyle/>
           <a:p>
+            <a:pPr/>
             <a:endParaRPr lang="ja-JP" altLang="en-US" sz="2400"/>
           </a:p>
         </p:txBody>
@@ -46820,7 +47014,7 @@
               <a:buNone/>
             </a:pPr>
             <a:r>
-              <a:rPr lang="en-US" sz="1100" dirty="0">
+              <a:rPr lang="en-US" sz="1600" dirty="0">
                 <a:solidFill>
                   <a:srgbClr val="4B5563"/>
                 </a:solidFill>
@@ -46866,6 +47060,7 @@
           <a:bodyPr/>
           <a:lstStyle/>
           <a:p>
+            <a:pPr/>
             <a:endParaRPr lang="ja-JP" altLang="en-US" sz="2400"/>
           </a:p>
         </p:txBody>
@@ -46969,6 +47164,7 @@
           <a:bodyPr/>
           <a:lstStyle/>
           <a:p>
+            <a:pPr/>
             <a:endParaRPr lang="ja-JP" altLang="en-US" sz="3200"/>
           </a:p>
         </p:txBody>
@@ -47008,7 +47204,7 @@
               <a:buNone/>
             </a:pPr>
             <a:r>
-              <a:rPr lang="en-US" sz="1400" dirty="0">
+              <a:rPr lang="en-US" sz="1600" dirty="0">
                 <a:solidFill>
                   <a:srgbClr val="4B5563"/>
                 </a:solidFill>
@@ -47052,6 +47248,7 @@
           <a:bodyPr/>
           <a:lstStyle/>
           <a:p>
+            <a:pPr/>
             <a:endParaRPr lang="ja-JP" altLang="en-US" sz="3200"/>
           </a:p>
         </p:txBody>
@@ -47091,7 +47288,7 @@
               <a:buNone/>
             </a:pPr>
             <a:r>
-              <a:rPr lang="en-US" sz="1400" dirty="0">
+              <a:rPr lang="en-US" sz="1600" dirty="0">
                 <a:solidFill>
                   <a:srgbClr val="4B5563"/>
                 </a:solidFill>
@@ -47135,6 +47332,7 @@
           <a:bodyPr/>
           <a:lstStyle/>
           <a:p>
+            <a:pPr/>
             <a:endParaRPr lang="ja-JP" altLang="en-US" sz="3200"/>
           </a:p>
         </p:txBody>
@@ -47174,7 +47372,7 @@
               <a:buNone/>
             </a:pPr>
             <a:r>
-              <a:rPr lang="en-US" sz="1400" dirty="0">
+              <a:rPr lang="en-US" sz="1600" dirty="0">
                 <a:solidFill>
                   <a:srgbClr val="4B5563"/>
                 </a:solidFill>
@@ -47243,6 +47441,7 @@
           <a:bodyPr/>
           <a:lstStyle/>
           <a:p>
+            <a:pPr/>
             <a:endParaRPr lang="ja-JP" altLang="en-US"/>
           </a:p>
         </p:txBody>
@@ -47725,6 +47924,7 @@
           <a:bodyPr/>
           <a:lstStyle/>
           <a:p>
+            <a:pPr/>
             <a:endParaRPr lang="ja-JP" altLang="en-US"/>
           </a:p>
         </p:txBody>
@@ -47752,6 +47952,7 @@
           <a:bodyPr/>
           <a:lstStyle/>
           <a:p>
+            <a:pPr/>
             <a:endParaRPr lang="ja-JP" altLang="en-US"/>
           </a:p>
         </p:txBody>
@@ -47786,6 +47987,7 @@
           <a:bodyPr/>
           <a:lstStyle/>
           <a:p>
+            <a:pPr/>
             <a:endParaRPr lang="ja-JP" altLang="en-US"/>
           </a:p>
         </p:txBody>
@@ -47815,7 +48017,7 @@
               <a:buNone/>
             </a:pPr>
             <a:r>
-              <a:rPr lang="en-US" sz="1000" b="1" kern="0" spc="105" dirty="0">
+              <a:rPr lang="en-US" sz="1600" b="1" kern="0" spc="105" dirty="0">
                 <a:solidFill>
                   <a:srgbClr val="6B7280"/>
                 </a:solidFill>
@@ -47909,6 +48111,7 @@
           <a:bodyPr/>
           <a:lstStyle/>
           <a:p>
+            <a:pPr/>
             <a:endParaRPr lang="ja-JP" altLang="en-US"/>
           </a:p>
         </p:txBody>
@@ -47938,7 +48141,7 @@
               <a:buNone/>
             </a:pPr>
             <a:r>
-              <a:rPr lang="en-US" sz="1500" dirty="0">
+              <a:rPr lang="en-US" sz="1600" dirty="0">
                 <a:solidFill>
                   <a:srgbClr val="9CA3AF"/>
                 </a:solidFill>
@@ -47982,6 +48185,7 @@
           <a:bodyPr/>
           <a:lstStyle/>
           <a:p>
+            <a:pPr/>
             <a:endParaRPr lang="ja-JP" altLang="en-US"/>
           </a:p>
         </p:txBody>
@@ -48145,6 +48349,7 @@
           <a:bodyPr/>
           <a:lstStyle/>
           <a:p>
+            <a:pPr/>
             <a:endParaRPr lang="ja-JP" altLang="en-US"/>
           </a:p>
         </p:txBody>
@@ -48282,6 +48487,7 @@
           <a:bodyPr/>
           <a:lstStyle/>
           <a:p>
+            <a:pPr/>
             <a:endParaRPr lang="ja-JP" altLang="en-US"/>
           </a:p>
         </p:txBody>
@@ -48323,6 +48529,7 @@
           <a:bodyPr/>
           <a:lstStyle/>
           <a:p>
+            <a:pPr/>
             <a:endParaRPr lang="ja-JP" altLang="en-US"/>
           </a:p>
         </p:txBody>
@@ -48359,6 +48566,7 @@
           <a:bodyPr/>
           <a:lstStyle/>
           <a:p>
+            <a:pPr/>
             <a:endParaRPr lang="ja-JP" altLang="en-US"/>
           </a:p>
         </p:txBody>
@@ -48395,6 +48603,7 @@
           <a:bodyPr/>
           <a:lstStyle/>
           <a:p>
+            <a:pPr/>
             <a:endParaRPr lang="ja-JP" altLang="en-US"/>
           </a:p>
         </p:txBody>
@@ -48431,6 +48640,7 @@
           <a:bodyPr/>
           <a:lstStyle/>
           <a:p>
+            <a:pPr/>
             <a:endParaRPr lang="ja-JP" altLang="en-US"/>
           </a:p>
         </p:txBody>
@@ -48516,6 +48726,7 @@
           <a:bodyPr/>
           <a:lstStyle/>
           <a:p>
+            <a:pPr/>
             <a:endParaRPr lang="ja-JP" altLang="en-US"/>
           </a:p>
         </p:txBody>
@@ -48601,6 +48812,7 @@
           <a:bodyPr/>
           <a:lstStyle/>
           <a:p>
+            <a:pPr/>
             <a:endParaRPr lang="ja-JP" altLang="en-US"/>
           </a:p>
         </p:txBody>
@@ -48866,7 +49078,7 @@
               <a:buNone/>
             </a:pPr>
             <a:r>
-              <a:rPr lang="en-US" sz="1200" dirty="0">
+              <a:rPr lang="en-US" sz="1600" dirty="0">
                 <a:solidFill>
                   <a:srgbClr val="9CA3AF"/>
                 </a:solidFill>
@@ -49098,6 +49310,7 @@
           <a:bodyPr/>
           <a:lstStyle/>
           <a:p>
+            <a:pPr/>
             <a:endParaRPr lang="ja-JP" altLang="en-US"/>
           </a:p>
         </p:txBody>
@@ -49222,6 +49435,7 @@
           <a:bodyPr/>
           <a:lstStyle/>
           <a:p>
+            <a:pPr/>
             <a:endParaRPr lang="ja-JP" altLang="en-US"/>
           </a:p>
         </p:txBody>
@@ -49261,7 +49475,7 @@
               <a:buNone/>
             </a:pPr>
             <a:r>
-              <a:rPr lang="en-US" sz="1100" b="1" dirty="0">
+              <a:rPr lang="en-US" sz="1600" b="1" dirty="0">
                 <a:solidFill>
                   <a:srgbClr val="6D28D9"/>
                 </a:solidFill>
@@ -49344,6 +49558,7 @@
           <a:bodyPr/>
           <a:lstStyle/>
           <a:p>
+            <a:pPr/>
             <a:endParaRPr lang="ja-JP" altLang="en-US"/>
           </a:p>
         </p:txBody>
@@ -49636,6 +49851,7 @@
           <a:bodyPr/>
           <a:lstStyle/>
           <a:p>
+            <a:pPr/>
             <a:endParaRPr lang="ja-JP" altLang="en-US"/>
           </a:p>
         </p:txBody>
@@ -49672,6 +49888,7 @@
           <a:bodyPr/>
           <a:lstStyle/>
           <a:p>
+            <a:pPr/>
             <a:endParaRPr lang="ja-JP" altLang="en-US"/>
           </a:p>
         </p:txBody>
@@ -49803,6 +50020,7 @@
           <a:bodyPr/>
           <a:lstStyle/>
           <a:p>
+            <a:pPr/>
             <a:endParaRPr lang="ja-JP" altLang="en-US"/>
           </a:p>
         </p:txBody>
@@ -49975,6 +50193,7 @@
           <a:bodyPr/>
           <a:lstStyle/>
           <a:p>
+            <a:pPr/>
             <a:endParaRPr lang="ja-JP" altLang="en-US"/>
           </a:p>
         </p:txBody>
@@ -50004,7 +50223,7 @@
               <a:buNone/>
             </a:pPr>
             <a:r>
-              <a:rPr lang="en-US" sz="1300" b="1" kern="0" spc="135" dirty="0">
+              <a:rPr lang="en-US" sz="1600" b="1" kern="0" spc="135" dirty="0">
                 <a:solidFill>
                   <a:srgbClr val="6B7280"/>
                 </a:solidFill>
@@ -50098,6 +50317,7 @@
           <a:bodyPr/>
           <a:lstStyle/>
           <a:p>
+            <a:pPr/>
             <a:endParaRPr lang="ja-JP" altLang="en-US"/>
           </a:p>
         </p:txBody>
@@ -50127,7 +50347,7 @@
               <a:buNone/>
             </a:pPr>
             <a:r>
-              <a:rPr lang="en-US" sz="1300" dirty="0">
+              <a:rPr lang="en-US" sz="1600" dirty="0">
                 <a:solidFill>
                   <a:srgbClr val="9CA3AF"/>
                 </a:solidFill>
@@ -50164,6 +50384,7 @@
           <a:bodyPr/>
           <a:lstStyle/>
           <a:p>
+            <a:pPr/>
             <a:endParaRPr lang="ja-JP" altLang="en-US"/>
           </a:p>
         </p:txBody>
@@ -50198,6 +50419,7 @@
           <a:bodyPr/>
           <a:lstStyle/>
           <a:p>
+            <a:pPr/>
             <a:endParaRPr lang="ja-JP" altLang="en-US"/>
           </a:p>
         </p:txBody>
@@ -50227,7 +50449,7 @@
               <a:buNone/>
             </a:pPr>
             <a:r>
-              <a:rPr lang="en-US" sz="1200" dirty="0">
+              <a:rPr lang="en-US" sz="1600" dirty="0">
                 <a:solidFill>
                   <a:srgbClr val="9CA3AF"/>
                 </a:solidFill>
@@ -50266,7 +50488,7 @@
               <a:buNone/>
             </a:pPr>
             <a:r>
-              <a:rPr lang="en-US" sz="1200" dirty="0">
+              <a:rPr lang="en-US" sz="1600" dirty="0">
                 <a:solidFill>
                   <a:srgbClr val="9CA3AF"/>
                 </a:solidFill>
